--- a/Final Project.pptx
+++ b/Final Project.pptx
@@ -125,6 +125,11 @@
       </a:defRPr>
     </a:lvl9pPr>
   </p:defaultTextStyle>
+  <p:extLst>
+    <p:ext uri="{EFAFB233-063F-42B5-8137-9DF3F51BA10A}">
+      <p15:sldGuideLst xmlns:p15="http://schemas.microsoft.com/office/powerpoint/2012/main"/>
+    </p:ext>
+  </p:extLst>
 </p:presentation>
 </file>
 
@@ -210,7 +215,7 @@
           <a:p>
             <a:fld id="{01C42146-6CDE-B740-961D-C7264D08B387}" type="datetimeFigureOut">
               <a:rPr lang="en-US" smtClean="0"/>
-              <a:t>6/8/26</a:t>
+              <a:t>6/9/26</a:t>
             </a:fld>
             <a:endParaRPr lang="en-US"/>
           </a:p>
@@ -530,7 +535,7 @@
             </a:br>
             <a:r>
               <a:rPr lang="en-US" dirty="0"/>
-              <a:t>Took intentionally vulnerable and malicious program and analyzed it issues using </a:t>
+              <a:t>Took intentionally vulnerable/pseudo malicious program and analyzed it for issues using static and dynamic techniques: </a:t>
             </a:r>
             <a:r>
               <a:rPr lang="en-US" dirty="0" err="1"/>
@@ -546,7 +551,31 @@
             </a:r>
             <a:r>
               <a:rPr lang="en-US" dirty="0"/>
-              <a:t>, radare2, and other CLI tools.</a:t>
+              <a:t>, radare2, </a:t>
+            </a:r>
+            <a:r>
+              <a:rPr lang="en-US" dirty="0" err="1"/>
+              <a:t>ltrace</a:t>
+            </a:r>
+            <a:r>
+              <a:rPr lang="en-US" dirty="0"/>
+              <a:t>, </a:t>
+            </a:r>
+            <a:r>
+              <a:rPr lang="en-US" dirty="0" err="1"/>
+              <a:t>strace</a:t>
+            </a:r>
+            <a:r>
+              <a:rPr lang="en-US" dirty="0"/>
+              <a:t>, and </a:t>
+            </a:r>
+            <a:r>
+              <a:rPr lang="en-US" dirty="0" err="1"/>
+              <a:t>gdb</a:t>
+            </a:r>
+            <a:r>
+              <a:rPr lang="en-US" dirty="0"/>
+              <a:t>.</a:t>
             </a:r>
           </a:p>
         </p:txBody>
@@ -637,9 +666,20 @@
             </a:r>
           </a:p>
           <a:p>
-            <a:r>
-              <a:rPr lang="en-US" dirty="0"/>
-              <a:t>This is the main function call graph showing assembly.</a:t>
+            <a:endParaRPr lang="en-US" dirty="0"/>
+          </a:p>
+          <a:p>
+            <a:r>
+              <a:rPr lang="en-US" dirty="0"/>
+              <a:t>This graph was generated by </a:t>
+            </a:r>
+            <a:r>
+              <a:rPr lang="en-US" dirty="0" err="1"/>
+              <a:t>Ghidra</a:t>
+            </a:r>
+            <a:r>
+              <a:rPr lang="en-US" dirty="0"/>
+              <a:t> and shows main in Assembly rather than C. This graph is intended to complement the other ones, but shows the raw program.</a:t>
             </a:r>
           </a:p>
         </p:txBody>
@@ -1426,7 +1466,7 @@
           <a:p>
             <a:r>
               <a:rPr lang="en-US" dirty="0"/>
-              <a:t>While it is not dangerous to print the /proc/self/maps interface, the ability for potentially insecure apps to read it are a concern.</a:t>
+              <a:t>While it is not dangerous to print the /proc/self/maps pseudo file, the ability for a malicious app to write in unguarded apps or platforms could be high. </a:t>
             </a:r>
           </a:p>
         </p:txBody>
@@ -1587,18 +1627,15 @@
           </a:p>
           <a:p>
             <a:pPr fontAlgn="base"/>
-            <a:r>
-              <a:rPr lang="en-US" sz="1200" kern="1200" dirty="0">
-                <a:solidFill>
-                  <a:schemeClr val="tx1"/>
-                </a:solidFill>
-                <a:effectLst/>
-                <a:latin typeface="+mn-lt"/>
-                <a:ea typeface="+mn-ea"/>
-                <a:cs typeface="+mn-cs"/>
-              </a:rPr>
-              <a:t>c</a:t>
-            </a:r>
+            <a:endParaRPr lang="en-US" sz="1200" kern="1200" dirty="0">
+              <a:solidFill>
+                <a:schemeClr val="tx1"/>
+              </a:solidFill>
+              <a:effectLst/>
+              <a:latin typeface="+mn-lt"/>
+              <a:ea typeface="+mn-ea"/>
+              <a:cs typeface="+mn-cs"/>
+            </a:endParaRPr>
           </a:p>
           <a:p>
             <a:pPr fontAlgn="base"/>
@@ -1800,6 +1837,30 @@
           </a:p>
           <a:p>
             <a:pPr fontAlgn="base"/>
+            <a:endParaRPr lang="en-US" sz="1200" kern="1200">
+              <a:solidFill>
+                <a:schemeClr val="tx1"/>
+              </a:solidFill>
+              <a:effectLst/>
+              <a:latin typeface="+mn-lt"/>
+              <a:ea typeface="+mn-ea"/>
+              <a:cs typeface="+mn-cs"/>
+            </a:endParaRPr>
+          </a:p>
+          <a:p>
+            <a:pPr fontAlgn="base"/>
+            <a:endParaRPr lang="en-US" sz="1200" kern="1200" dirty="0">
+              <a:solidFill>
+                <a:schemeClr val="tx1"/>
+              </a:solidFill>
+              <a:effectLst/>
+              <a:latin typeface="+mn-lt"/>
+              <a:ea typeface="+mn-ea"/>
+              <a:cs typeface="+mn-cs"/>
+            </a:endParaRPr>
+          </a:p>
+          <a:p>
+            <a:pPr fontAlgn="base"/>
             <a:r>
               <a:rPr lang="en-US" sz="1200" b="0" i="0" kern="1200" dirty="0">
                 <a:solidFill>
@@ -1878,18 +1939,15 @@
           </a:p>
           <a:p>
             <a:pPr fontAlgn="base"/>
-            <a:r>
-              <a:rPr lang="en-US" sz="1200" kern="1200" dirty="0">
-                <a:solidFill>
-                  <a:schemeClr val="tx1"/>
-                </a:solidFill>
-                <a:effectLst/>
-                <a:latin typeface="+mn-lt"/>
-                <a:ea typeface="+mn-ea"/>
-                <a:cs typeface="+mn-cs"/>
-              </a:rPr>
-              <a:t>c</a:t>
-            </a:r>
+            <a:endParaRPr lang="en-US" sz="1200" kern="1200" dirty="0">
+              <a:solidFill>
+                <a:schemeClr val="tx1"/>
+              </a:solidFill>
+              <a:effectLst/>
+              <a:latin typeface="+mn-lt"/>
+              <a:ea typeface="+mn-ea"/>
+              <a:cs typeface="+mn-cs"/>
+            </a:endParaRPr>
           </a:p>
           <a:p>
             <a:pPr fontAlgn="base"/>
@@ -3269,16 +3327,33 @@
             </a:r>
           </a:p>
           <a:p>
-            <a:r>
-              <a:rPr lang="en-US" dirty="0"/>
-              <a:t>First, we needed to understand what the program is and what it does. Then we need to figure out how it does things.</a:t>
-            </a:r>
-          </a:p>
-          <a:p>
-            <a:r>
-              <a:rPr lang="en-US" dirty="0"/>
-              <a:t>From there, we can analyze places that can be improved or code which could cause harm if executed.</a:t>
-            </a:r>
+            <a:endParaRPr lang="en-US" dirty="0"/>
+          </a:p>
+          <a:p>
+            <a:r>
+              <a:rPr lang="en-US" dirty="0"/>
+              <a:t>First, we needed to understand what the program is and what it does. Then we need to figure out </a:t>
+            </a:r>
+            <a:r>
+              <a:rPr lang="en-US" i="1" dirty="0"/>
+              <a:t>how</a:t>
+            </a:r>
+            <a:r>
+              <a:rPr lang="en-US" dirty="0"/>
+              <a:t> it does things.</a:t>
+            </a:r>
+          </a:p>
+          <a:p>
+            <a:endParaRPr lang="en-US" dirty="0"/>
+          </a:p>
+          <a:p>
+            <a:r>
+              <a:rPr lang="en-US" dirty="0"/>
+              <a:t>From there, we can analyze places that are vulnerable, malicious, or poor quality. This could includes buffer overflows, lack of validation, and privilege escalation.</a:t>
+            </a:r>
+          </a:p>
+          <a:p>
+            <a:endParaRPr lang="en-US" dirty="0"/>
           </a:p>
           <a:p>
             <a:r>
@@ -3376,20 +3451,52 @@
           <a:p>
             <a:r>
               <a:rPr lang="en-US" dirty="0"/>
-              <a:t>We used a total of 6 tools, but primarily engaged with these 4.</a:t>
-            </a:r>
-          </a:p>
-          <a:p>
-            <a:endParaRPr lang="en-US" dirty="0"/>
-          </a:p>
-          <a:p>
+              <a:t>We used a total of 6 tools, but primarily engaged with </a:t>
+            </a:r>
             <a:r>
               <a:rPr lang="en-US" dirty="0" err="1"/>
               <a:t>binwalk</a:t>
             </a:r>
             <a:r>
               <a:rPr lang="en-US" dirty="0"/>
-              <a:t> was used to determine program sections, offsets, and calculated the program’s entropy. </a:t>
+              <a:t>, </a:t>
+            </a:r>
+            <a:r>
+              <a:rPr lang="en-US" dirty="0" err="1"/>
+              <a:t>ghidra</a:t>
+            </a:r>
+            <a:r>
+              <a:rPr lang="en-US" dirty="0"/>
+              <a:t>, GDB, </a:t>
+            </a:r>
+            <a:r>
+              <a:rPr lang="en-US" dirty="0" err="1"/>
+              <a:t>ltrace</a:t>
+            </a:r>
+            <a:r>
+              <a:rPr lang="en-US" dirty="0"/>
+              <a:t>, and </a:t>
+            </a:r>
+            <a:r>
+              <a:rPr lang="en-US" dirty="0" err="1"/>
+              <a:t>strace</a:t>
+            </a:r>
+            <a:r>
+              <a:rPr lang="en-US" dirty="0"/>
+              <a:t>.</a:t>
+            </a:r>
+          </a:p>
+          <a:p>
+            <a:endParaRPr lang="en-US" dirty="0"/>
+          </a:p>
+          <a:p>
+            <a:r>
+              <a:rPr lang="en-US" dirty="0" err="1"/>
+              <a:t>binwalk</a:t>
+            </a:r>
+            <a:r>
+              <a:rPr lang="en-US" dirty="0"/>
+              <a:t> was used to determine program sections, offsets, and calculated the program’s entropy. This will be discussed on the next slide.</a:t>
             </a:r>
           </a:p>
           <a:p>
@@ -3402,7 +3509,7 @@
             </a:r>
             <a:r>
               <a:rPr lang="en-US" dirty="0"/>
-              <a:t> was used to disassemble the program, create a call graph, see which standard library functions were called, and exposed 5 orphaned functions.</a:t>
+              <a:t> was used to disassemble the program, create a call graph, see which standard library functions were called, and exposed 5 orphaned functions. Some code and function call graphs will be discussed.</a:t>
             </a:r>
           </a:p>
           <a:p>
@@ -3411,7 +3518,7 @@
           <a:p>
             <a:r>
               <a:rPr lang="en-US" dirty="0"/>
-              <a:t>The last major tool we used was GDB for dynamic debugging.</a:t>
+              <a:t>The last major tool we used was GDB for dynamic debugging which allowed us to easily call the orphaned functions.</a:t>
             </a:r>
           </a:p>
           <a:p>
@@ -3555,7 +3662,7 @@
           <a:p>
             <a:r>
               <a:rPr lang="en-US" dirty="0"/>
-              <a:t>Here, we see the entropy spikes at the approximate program offsets. In the center of the screen, the falling entropy edge is 0.283684 which shows the entropy is very low indicating a plain-text simple program (not a lot of randomness.) This makes it very easy to learn RE.</a:t>
+              <a:t>On the right, we see the entropy graph spikes at the approximate program offsets. This is expected, so it is not considered significant.</a:t>
             </a:r>
           </a:p>
           <a:p>
@@ -3564,7 +3671,7 @@
           <a:p>
             <a:r>
               <a:rPr lang="en-US" dirty="0"/>
-              <a:t>On the bottom, the program’s checksum, and sectors are provided.</a:t>
+              <a:t>In the center of the screen, the falling entropy edge is 0.283684 which shows the entropy is very low indicating a plain-text simple program (not a lot of randomness, nor encryption.) This makes it very easy to practice reverse engineering.</a:t>
             </a:r>
           </a:p>
           <a:p>
@@ -3573,7 +3680,7 @@
           <a:p>
             <a:r>
               <a:rPr lang="en-US" dirty="0"/>
-              <a:t>We are about the ELF section, which is the executable.</a:t>
+              <a:t>On the bottom, the program’s checksum, and sectors are provided. </a:t>
             </a:r>
           </a:p>
           <a:p>
@@ -3582,7 +3689,16 @@
           <a:p>
             <a:r>
               <a:rPr lang="en-US" dirty="0"/>
-              <a:t>For this analysis, the ESP image is ignored as we will not try to exploit any loading.</a:t>
+              <a:t>We care about the ELF section, which is the executable. This shows it is an AMD x86-64 program which means it requires a 64-bit non-ARM machine to run on.</a:t>
+            </a:r>
+          </a:p>
+          <a:p>
+            <a:endParaRPr lang="en-US" dirty="0"/>
+          </a:p>
+          <a:p>
+            <a:r>
+              <a:rPr lang="en-US" dirty="0"/>
+              <a:t>For this analysis, the ESP image is ignored since it would only be used for possibly running on a microprocessor. As such, we only care about the ELF image.</a:t>
             </a:r>
           </a:p>
           <a:p>
@@ -3685,26 +3801,148 @@
             <a:endParaRPr lang="en-US" dirty="0"/>
           </a:p>
           <a:p>
-            <a:r>
-              <a:rPr lang="en-US" dirty="0" err="1"/>
+            <a:pPr fontAlgn="base"/>
+            <a:r>
+              <a:rPr lang="en-US" sz="1200" b="0" i="0" kern="1200" dirty="0">
+                <a:solidFill>
+                  <a:schemeClr val="tx1"/>
+                </a:solidFill>
+                <a:effectLst/>
+                <a:latin typeface="+mn-lt"/>
+                <a:ea typeface="+mn-ea"/>
+                <a:cs typeface="+mn-cs"/>
+              </a:rPr>
+              <a:t>Action: Used </a:t>
+            </a:r>
+            <a:r>
+              <a:rPr lang="en-US" sz="1200" b="0" i="0" kern="1200" dirty="0" err="1">
+                <a:solidFill>
+                  <a:schemeClr val="tx1"/>
+                </a:solidFill>
+                <a:effectLst/>
+                <a:latin typeface="+mn-lt"/>
+                <a:ea typeface="+mn-ea"/>
+                <a:cs typeface="+mn-cs"/>
+              </a:rPr>
               <a:t>Ghidra</a:t>
             </a:r>
             <a:r>
-              <a:rPr lang="en-US" dirty="0"/>
-              <a:t> saved a lot of manual work resolving system and program calls. This also reversed names of function (single-character names).</a:t>
-            </a:r>
-          </a:p>
-          <a:p>
-            <a:endParaRPr lang="en-US" dirty="0"/>
-          </a:p>
-          <a:p>
-            <a:r>
-              <a:rPr lang="en-US" dirty="0"/>
-              <a:t>It took the program and generated C code from the assembly.  The screenshot shows the raw version of main before renaming variables for comprehension.</a:t>
-            </a:r>
-          </a:p>
-          <a:p>
-            <a:endParaRPr lang="en-US" dirty="0"/>
+              <a:rPr lang="en-US" sz="1200" b="0" i="0" kern="1200" dirty="0">
+                <a:solidFill>
+                  <a:schemeClr val="tx1"/>
+                </a:solidFill>
+                <a:effectLst/>
+                <a:latin typeface="+mn-lt"/>
+                <a:ea typeface="+mn-ea"/>
+                <a:cs typeface="+mn-cs"/>
+              </a:rPr>
+              <a:t> to decompile the binary and generate C from assembly.</a:t>
+            </a:r>
+          </a:p>
+          <a:p>
+            <a:pPr fontAlgn="base"/>
+            <a:r>
+              <a:rPr lang="en-US" sz="1200" b="0" i="0" kern="1200" dirty="0">
+                <a:solidFill>
+                  <a:schemeClr val="tx1"/>
+                </a:solidFill>
+                <a:effectLst/>
+                <a:latin typeface="+mn-lt"/>
+                <a:ea typeface="+mn-ea"/>
+                <a:cs typeface="+mn-cs"/>
+              </a:rPr>
+              <a:t>Results</a:t>
+            </a:r>
+          </a:p>
+          <a:p>
+            <a:pPr marL="171450" indent="-171450" fontAlgn="base">
+              <a:buFontTx/>
+              <a:buChar char="-"/>
+            </a:pPr>
+            <a:r>
+              <a:rPr lang="en-US" sz="1200" b="0" i="0" kern="1200" dirty="0">
+                <a:solidFill>
+                  <a:schemeClr val="tx1"/>
+                </a:solidFill>
+                <a:effectLst/>
+                <a:latin typeface="+mn-lt"/>
+                <a:ea typeface="+mn-ea"/>
+                <a:cs typeface="+mn-cs"/>
+              </a:rPr>
+              <a:t>Produced readable C output for main (screenshot shows raw decompiled main before and after variable renaming).</a:t>
+            </a:r>
+          </a:p>
+          <a:p>
+            <a:pPr marL="171450" indent="-171450" fontAlgn="base">
+              <a:buFontTx/>
+              <a:buChar char="-"/>
+            </a:pPr>
+            <a:r>
+              <a:rPr lang="en-US" sz="1200" b="0" i="0" kern="1200" dirty="0">
+                <a:solidFill>
+                  <a:schemeClr val="tx1"/>
+                </a:solidFill>
+                <a:effectLst/>
+                <a:latin typeface="+mn-lt"/>
+                <a:ea typeface="+mn-ea"/>
+                <a:cs typeface="+mn-cs"/>
+              </a:rPr>
+              <a:t>Resolved system and program calls, converting many call sites to named functions.</a:t>
+            </a:r>
+          </a:p>
+          <a:p>
+            <a:pPr marL="171450" indent="-171450" fontAlgn="base">
+              <a:buFontTx/>
+              <a:buChar char="-"/>
+            </a:pPr>
+            <a:r>
+              <a:rPr lang="en-US" sz="1200" b="0" i="0" kern="1200" dirty="0">
+                <a:solidFill>
+                  <a:schemeClr val="tx1"/>
+                </a:solidFill>
+                <a:effectLst/>
+                <a:latin typeface="+mn-lt"/>
+                <a:ea typeface="+mn-ea"/>
+                <a:cs typeface="+mn-cs"/>
+              </a:rPr>
+              <a:t>Recovered/renamed numerous functions (originally single-character or autogenerated names).</a:t>
+            </a:r>
+          </a:p>
+          <a:p>
+            <a:pPr marL="171450" indent="-171450" fontAlgn="base">
+              <a:buFontTx/>
+              <a:buChar char="-"/>
+            </a:pPr>
+            <a:r>
+              <a:rPr lang="en-US" sz="1200" b="0" i="0" kern="1200" dirty="0">
+                <a:solidFill>
+                  <a:schemeClr val="tx1"/>
+                </a:solidFill>
+                <a:effectLst/>
+                <a:latin typeface="+mn-lt"/>
+                <a:ea typeface="+mn-ea"/>
+                <a:cs typeface="+mn-cs"/>
+              </a:rPr>
+              <a:t>Identified 5 unreferenced functions (possible dead code or library leftovers).</a:t>
+            </a:r>
+          </a:p>
+          <a:p>
+            <a:pPr marL="171450" indent="-171450" fontAlgn="base">
+              <a:buFontTx/>
+              <a:buChar char="-"/>
+            </a:pPr>
+            <a:r>
+              <a:rPr lang="en-US" sz="1200" b="0" i="0" kern="1200" dirty="0">
+                <a:solidFill>
+                  <a:schemeClr val="tx1"/>
+                </a:solidFill>
+                <a:effectLst/>
+                <a:latin typeface="+mn-lt"/>
+                <a:ea typeface="+mn-ea"/>
+                <a:cs typeface="+mn-cs"/>
+              </a:rPr>
+              <a:t>Significantly reduced manual analysis effort by automating call-resolution and decomplication.</a:t>
+            </a:r>
           </a:p>
           <a:p>
             <a:endParaRPr lang="en-US" dirty="0"/>
@@ -3793,7 +4031,7 @@
           <a:p>
             <a:r>
               <a:rPr lang="en-US" dirty="0"/>
-              <a:t>5 – 10 sec</a:t>
+              <a:t>~ 10 sec</a:t>
             </a:r>
           </a:p>
           <a:p>
@@ -3802,16 +4040,143 @@
           <a:p>
             <a:r>
               <a:rPr lang="en-US" dirty="0"/>
-              <a:t>These are the analysis options selected when importing the program. This stage allowed us to have </a:t>
-            </a:r>
-            <a:r>
-              <a:rPr lang="en-US" dirty="0" err="1"/>
-              <a:t>Ghidra</a:t>
-            </a:r>
-            <a:r>
-              <a:rPr lang="en-US" dirty="0"/>
-              <a:t> attempt to resolve names for functions and indicate types.</a:t>
-            </a:r>
+              <a:t>The follow are the most useful options.</a:t>
+            </a:r>
+          </a:p>
+          <a:p>
+            <a:endParaRPr lang="en-US" dirty="0"/>
+          </a:p>
+          <a:p>
+            <a:pPr fontAlgn="base"/>
+            <a:r>
+              <a:rPr lang="en-US" sz="1200" b="0" i="0" kern="1200" dirty="0" err="1">
+                <a:solidFill>
+                  <a:schemeClr val="tx1"/>
+                </a:solidFill>
+                <a:effectLst/>
+                <a:latin typeface="+mn-lt"/>
+                <a:ea typeface="+mn-ea"/>
+                <a:cs typeface="+mn-cs"/>
+              </a:rPr>
+              <a:t>Decompiler</a:t>
+            </a:r>
+            <a:r>
+              <a:rPr lang="en-US" sz="1200" b="0" i="0" kern="1200" dirty="0">
+                <a:solidFill>
+                  <a:schemeClr val="tx1"/>
+                </a:solidFill>
+                <a:effectLst/>
+                <a:latin typeface="+mn-lt"/>
+                <a:ea typeface="+mn-ea"/>
+                <a:cs typeface="+mn-cs"/>
+              </a:rPr>
+              <a:t> Param/Local Recovery — reconstructs function parameters and local variables so the </a:t>
+            </a:r>
+            <a:r>
+              <a:rPr lang="en-US" sz="1200" b="0" i="0" kern="1200" dirty="0" err="1">
+                <a:solidFill>
+                  <a:schemeClr val="tx1"/>
+                </a:solidFill>
+                <a:effectLst/>
+                <a:latin typeface="+mn-lt"/>
+                <a:ea typeface="+mn-ea"/>
+                <a:cs typeface="+mn-cs"/>
+              </a:rPr>
+              <a:t>decompiler</a:t>
+            </a:r>
+            <a:r>
+              <a:rPr lang="en-US" sz="1200" b="0" i="0" kern="1200" dirty="0">
+                <a:solidFill>
+                  <a:schemeClr val="tx1"/>
+                </a:solidFill>
+                <a:effectLst/>
+                <a:latin typeface="+mn-lt"/>
+                <a:ea typeface="+mn-ea"/>
+                <a:cs typeface="+mn-cs"/>
+              </a:rPr>
+              <a:t> produces readable C prototypes and local names instead of raw registers/stack offsets.</a:t>
+            </a:r>
+          </a:p>
+          <a:p>
+            <a:pPr fontAlgn="base"/>
+            <a:endParaRPr lang="en-US" sz="1200" b="0" i="0" kern="1200" dirty="0">
+              <a:solidFill>
+                <a:schemeClr val="tx1"/>
+              </a:solidFill>
+              <a:effectLst/>
+              <a:latin typeface="+mn-lt"/>
+              <a:ea typeface="+mn-ea"/>
+              <a:cs typeface="+mn-cs"/>
+            </a:endParaRPr>
+          </a:p>
+          <a:p>
+            <a:pPr fontAlgn="base"/>
+            <a:r>
+              <a:rPr lang="en-US" sz="1200" b="0" i="0" kern="1200" dirty="0">
+                <a:solidFill>
+                  <a:schemeClr val="tx1"/>
+                </a:solidFill>
+                <a:effectLst/>
+                <a:latin typeface="+mn-lt"/>
+                <a:ea typeface="+mn-ea"/>
+                <a:cs typeface="+mn-cs"/>
+              </a:rPr>
+              <a:t>Call Convention &amp; Function ID — identifies calling conventions and matches known library/</a:t>
+            </a:r>
+            <a:r>
+              <a:rPr lang="en-US" sz="1200" b="0" i="0" kern="1200" dirty="0" err="1">
+                <a:solidFill>
+                  <a:schemeClr val="tx1"/>
+                </a:solidFill>
+                <a:effectLst/>
+                <a:latin typeface="+mn-lt"/>
+                <a:ea typeface="+mn-ea"/>
+                <a:cs typeface="+mn-cs"/>
+              </a:rPr>
+              <a:t>syscall</a:t>
+            </a:r>
+            <a:r>
+              <a:rPr lang="en-US" sz="1200" b="0" i="0" kern="1200" dirty="0">
+                <a:solidFill>
+                  <a:schemeClr val="tx1"/>
+                </a:solidFill>
+                <a:effectLst/>
+                <a:latin typeface="+mn-lt"/>
+                <a:ea typeface="+mn-ea"/>
+                <a:cs typeface="+mn-cs"/>
+              </a:rPr>
+              <a:t> functions so calls are shown with correct prototypes and recognizable names rather than opaque call sites.</a:t>
+            </a:r>
+          </a:p>
+          <a:p>
+            <a:pPr fontAlgn="base"/>
+            <a:endParaRPr lang="en-US" sz="1200" b="0" i="0" kern="1200" dirty="0">
+              <a:solidFill>
+                <a:schemeClr val="tx1"/>
+              </a:solidFill>
+              <a:effectLst/>
+              <a:latin typeface="+mn-lt"/>
+              <a:ea typeface="+mn-ea"/>
+              <a:cs typeface="+mn-cs"/>
+            </a:endParaRPr>
+          </a:p>
+          <a:p>
+            <a:pPr fontAlgn="base"/>
+            <a:r>
+              <a:rPr lang="en-US" sz="1200" b="0" i="0" kern="1200" dirty="0">
+                <a:solidFill>
+                  <a:schemeClr val="tx1"/>
+                </a:solidFill>
+                <a:effectLst/>
+                <a:latin typeface="+mn-lt"/>
+                <a:ea typeface="+mn-ea"/>
+                <a:cs typeface="+mn-cs"/>
+              </a:rPr>
+              <a:t>Data/String Analyzers &amp; Reference Recovery — finds embedded strings, constants, and cross-references, which quickly reveals I/O, file paths, protocol handlers, and where code uses those data items.</a:t>
+            </a:r>
+          </a:p>
+          <a:p>
+            <a:endParaRPr lang="en-US" dirty="0"/>
           </a:p>
         </p:txBody>
       </p:sp>
@@ -3912,7 +4277,19 @@
               <a:rPr lang="en-US" dirty="0" err="1"/>
               <a:t>Ghidra</a:t>
             </a:r>
+            <a:r>
+              <a:rPr lang="en-US" dirty="0"/>
+              <a:t>.</a:t>
+            </a:r>
+          </a:p>
+          <a:p>
             <a:endParaRPr lang="en-US" dirty="0"/>
+          </a:p>
+          <a:p>
+            <a:r>
+              <a:rPr lang="en-US" dirty="0"/>
+              <a:t>We found the program uses c library shared object version 6.</a:t>
+            </a:r>
           </a:p>
         </p:txBody>
       </p:sp>
@@ -4015,7 +4392,16 @@
             </a:r>
             <a:r>
               <a:rPr lang="en-US" dirty="0"/>
-              <a:t> including system calls.</a:t>
+              <a:t> including system calls. This version is before all provided function names were renamed to what they do.</a:t>
+            </a:r>
+          </a:p>
+          <a:p>
+            <a:endParaRPr lang="en-US" dirty="0"/>
+          </a:p>
+          <a:p>
+            <a:r>
+              <a:rPr lang="en-US" dirty="0"/>
+              <a:t>This specific graph also shows system calls. While this is not a typical to include system calls, we thought it would be good to see which functions are used the most. Additionally, it would indicate which functions could have vulnerabilities without looking at the code directly.</a:t>
             </a:r>
           </a:p>
         </p:txBody>
@@ -4106,9 +4492,21 @@
             </a:r>
           </a:p>
           <a:p>
-            <a:r>
-              <a:rPr lang="en-US" dirty="0"/>
-              <a:t>This call graph shows user-defined functions clearing showing 5 orphaned functions. It identifies which functions need to called and in what order. There are 5 function which were called dynamically with </a:t>
+            <a:endParaRPr lang="en-US" dirty="0"/>
+          </a:p>
+          <a:p>
+            <a:r>
+              <a:rPr lang="en-US" dirty="0"/>
+              <a:t>This call graph shows user-defined functions clearing showing 5 orphaned functions.</a:t>
+            </a:r>
+          </a:p>
+          <a:p>
+            <a:endParaRPr lang="en-US" dirty="0"/>
+          </a:p>
+          <a:p>
+            <a:r>
+              <a:rPr lang="en-US" dirty="0"/>
+              <a:t>It identifies which functions need to called and in what order. There are 5 functions (illustrated as disconnected nodes) which were called with </a:t>
             </a:r>
             <a:r>
               <a:rPr lang="en-US" dirty="0" err="1"/>
@@ -4116,7 +4514,16 @@
             </a:r>
             <a:r>
               <a:rPr lang="en-US" dirty="0"/>
-              <a:t>. Nothing is possibly dangerous from the look of this call graph. However, it does lead to closer investigation of the 5 functions to see if they are implicitly called with malicious intentions.</a:t>
+              <a:t>.</a:t>
+            </a:r>
+          </a:p>
+          <a:p>
+            <a:endParaRPr lang="en-US" dirty="0"/>
+          </a:p>
+          <a:p>
+            <a:r>
+              <a:rPr lang="en-US" dirty="0"/>
+              <a:t>Nothing is possibly dangerous from the look of this call graph. However, it does lead to closer investigation of the 5 functions to see if they are implicitly called with malicious intentions.</a:t>
             </a:r>
           </a:p>
         </p:txBody>
@@ -4207,7 +4614,7 @@
           <a:noFill/>
           <a:extLst>
             <a:ext uri="{909E8E84-426E-40dd-AFC4-6F175D3DCCD1}">
-              <a14:hiddenFill xmlns:a14="http://schemas.microsoft.com/office/drawing/2010/main" xmlns="">
+              <a14:hiddenFill xmlns="" xmlns:a14="http://schemas.microsoft.com/office/drawing/2010/main">
                 <a:solidFill>
                   <a:srgbClr val="FFFFFF"/>
                 </a:solidFill>
@@ -4267,7 +4674,7 @@
             </a:ln>
             <a:extLst>
               <a:ext uri="{91240B29-F687-4f45-9708-019B960494DF}">
-                <a14:hiddenLine xmlns:a14="http://schemas.microsoft.com/office/drawing/2010/main" xmlns="" w="9525">
+                <a14:hiddenLine xmlns="" xmlns:a14="http://schemas.microsoft.com/office/drawing/2010/main" w="9525">
                   <a:solidFill>
                     <a:srgbClr val="000000"/>
                   </a:solidFill>
@@ -4357,7 +4764,7 @@
             </a:ln>
             <a:extLst>
               <a:ext uri="{91240B29-F687-4f45-9708-019B960494DF}">
-                <a14:hiddenLine xmlns:a14="http://schemas.microsoft.com/office/drawing/2010/main" xmlns="" w="9525">
+                <a14:hiddenLine xmlns="" xmlns:a14="http://schemas.microsoft.com/office/drawing/2010/main" w="9525">
                   <a:solidFill>
                     <a:srgbClr val="000000"/>
                   </a:solidFill>
@@ -4447,7 +4854,7 @@
             </a:ln>
             <a:extLst>
               <a:ext uri="{91240B29-F687-4f45-9708-019B960494DF}">
-                <a14:hiddenLine xmlns:a14="http://schemas.microsoft.com/office/drawing/2010/main" xmlns="" w="9525">
+                <a14:hiddenLine xmlns="" xmlns:a14="http://schemas.microsoft.com/office/drawing/2010/main" w="9525">
                   <a:solidFill>
                     <a:srgbClr val="000000"/>
                   </a:solidFill>
@@ -4481,7 +4888,7 @@
             </a:ln>
             <a:extLst>
               <a:ext uri="{91240B29-F687-4f45-9708-019B960494DF}">
-                <a14:hiddenLine xmlns:a14="http://schemas.microsoft.com/office/drawing/2010/main" xmlns="" w="9525">
+                <a14:hiddenLine xmlns="" xmlns:a14="http://schemas.microsoft.com/office/drawing/2010/main" w="9525">
                   <a:solidFill>
                     <a:srgbClr val="000000"/>
                   </a:solidFill>
@@ -4571,7 +4978,7 @@
             </a:ln>
             <a:extLst>
               <a:ext uri="{91240B29-F687-4f45-9708-019B960494DF}">
-                <a14:hiddenLine xmlns:a14="http://schemas.microsoft.com/office/drawing/2010/main" xmlns="" w="9525">
+                <a14:hiddenLine xmlns="" xmlns:a14="http://schemas.microsoft.com/office/drawing/2010/main" w="9525">
                   <a:solidFill>
                     <a:srgbClr val="000000"/>
                   </a:solidFill>
@@ -4633,7 +5040,7 @@
             </a:ln>
             <a:extLst>
               <a:ext uri="{91240B29-F687-4f45-9708-019B960494DF}">
-                <a14:hiddenLine xmlns:a14="http://schemas.microsoft.com/office/drawing/2010/main" xmlns="" w="9525">
+                <a14:hiddenLine xmlns="" xmlns:a14="http://schemas.microsoft.com/office/drawing/2010/main" w="9525">
                   <a:solidFill>
                     <a:srgbClr val="000000"/>
                   </a:solidFill>
@@ -4695,7 +5102,7 @@
             </a:ln>
             <a:extLst>
               <a:ext uri="{91240B29-F687-4f45-9708-019B960494DF}">
-                <a14:hiddenLine xmlns:a14="http://schemas.microsoft.com/office/drawing/2010/main" xmlns="" w="9525">
+                <a14:hiddenLine xmlns="" xmlns:a14="http://schemas.microsoft.com/office/drawing/2010/main" w="9525">
                   <a:solidFill>
                     <a:srgbClr val="000000"/>
                   </a:solidFill>
@@ -4785,7 +5192,7 @@
             </a:ln>
             <a:extLst>
               <a:ext uri="{91240B29-F687-4f45-9708-019B960494DF}">
-                <a14:hiddenLine xmlns:a14="http://schemas.microsoft.com/office/drawing/2010/main" xmlns="" w="9525">
+                <a14:hiddenLine xmlns="" xmlns:a14="http://schemas.microsoft.com/office/drawing/2010/main" w="9525">
                   <a:solidFill>
                     <a:srgbClr val="000000"/>
                   </a:solidFill>
@@ -4847,7 +5254,7 @@
             </a:ln>
             <a:extLst>
               <a:ext uri="{91240B29-F687-4f45-9708-019B960494DF}">
-                <a14:hiddenLine xmlns:a14="http://schemas.microsoft.com/office/drawing/2010/main" xmlns="" w="9525">
+                <a14:hiddenLine xmlns="" xmlns:a14="http://schemas.microsoft.com/office/drawing/2010/main" w="9525">
                   <a:solidFill>
                     <a:srgbClr val="000000"/>
                   </a:solidFill>
@@ -4909,7 +5316,7 @@
             </a:ln>
             <a:extLst>
               <a:ext uri="{91240B29-F687-4f45-9708-019B960494DF}">
-                <a14:hiddenLine xmlns:a14="http://schemas.microsoft.com/office/drawing/2010/main" xmlns="" w="9525">
+                <a14:hiddenLine xmlns="" xmlns:a14="http://schemas.microsoft.com/office/drawing/2010/main" w="9525">
                   <a:solidFill>
                     <a:srgbClr val="000000"/>
                   </a:solidFill>
@@ -4999,7 +5406,7 @@
             </a:ln>
             <a:extLst>
               <a:ext uri="{91240B29-F687-4f45-9708-019B960494DF}">
-                <a14:hiddenLine xmlns:a14="http://schemas.microsoft.com/office/drawing/2010/main" xmlns="" w="9525">
+                <a14:hiddenLine xmlns="" xmlns:a14="http://schemas.microsoft.com/office/drawing/2010/main" w="9525">
                   <a:solidFill>
                     <a:srgbClr val="000000"/>
                   </a:solidFill>
@@ -5089,7 +5496,7 @@
             </a:ln>
             <a:extLst>
               <a:ext uri="{91240B29-F687-4f45-9708-019B960494DF}">
-                <a14:hiddenLine xmlns:a14="http://schemas.microsoft.com/office/drawing/2010/main" xmlns="" w="9525">
+                <a14:hiddenLine xmlns="" xmlns:a14="http://schemas.microsoft.com/office/drawing/2010/main" w="9525">
                   <a:solidFill>
                     <a:srgbClr val="000000"/>
                   </a:solidFill>
@@ -5151,7 +5558,7 @@
             </a:ln>
             <a:extLst>
               <a:ext uri="{91240B29-F687-4f45-9708-019B960494DF}">
-                <a14:hiddenLine xmlns:a14="http://schemas.microsoft.com/office/drawing/2010/main" xmlns="" w="9525">
+                <a14:hiddenLine xmlns="" xmlns:a14="http://schemas.microsoft.com/office/drawing/2010/main" w="9525">
                   <a:solidFill>
                     <a:srgbClr val="000000"/>
                   </a:solidFill>
@@ -5261,7 +5668,7 @@
             </a:ln>
             <a:extLst>
               <a:ext uri="{91240B29-F687-4f45-9708-019B960494DF}">
-                <a14:hiddenLine xmlns:a14="http://schemas.microsoft.com/office/drawing/2010/main" xmlns="" w="9525">
+                <a14:hiddenLine xmlns="" xmlns:a14="http://schemas.microsoft.com/office/drawing/2010/main" w="9525">
                   <a:solidFill>
                     <a:srgbClr val="000000"/>
                   </a:solidFill>
@@ -5323,7 +5730,7 @@
             </a:ln>
             <a:extLst>
               <a:ext uri="{91240B29-F687-4f45-9708-019B960494DF}">
-                <a14:hiddenLine xmlns:a14="http://schemas.microsoft.com/office/drawing/2010/main" xmlns="" w="9525">
+                <a14:hiddenLine xmlns="" xmlns:a14="http://schemas.microsoft.com/office/drawing/2010/main" w="9525">
                   <a:solidFill>
                     <a:srgbClr val="000000"/>
                   </a:solidFill>
@@ -5413,7 +5820,7 @@
             </a:ln>
             <a:extLst>
               <a:ext uri="{91240B29-F687-4f45-9708-019B960494DF}">
-                <a14:hiddenLine xmlns:a14="http://schemas.microsoft.com/office/drawing/2010/main" xmlns="" w="9525">
+                <a14:hiddenLine xmlns="" xmlns:a14="http://schemas.microsoft.com/office/drawing/2010/main" w="9525">
                   <a:solidFill>
                     <a:srgbClr val="000000"/>
                   </a:solidFill>
@@ -5503,7 +5910,7 @@
             </a:ln>
             <a:extLst>
               <a:ext uri="{91240B29-F687-4f45-9708-019B960494DF}">
-                <a14:hiddenLine xmlns:a14="http://schemas.microsoft.com/office/drawing/2010/main" xmlns="" w="9525">
+                <a14:hiddenLine xmlns="" xmlns:a14="http://schemas.microsoft.com/office/drawing/2010/main" w="9525">
                   <a:solidFill>
                     <a:srgbClr val="000000"/>
                   </a:solidFill>
@@ -5565,7 +5972,7 @@
             </a:ln>
             <a:extLst>
               <a:ext uri="{91240B29-F687-4f45-9708-019B960494DF}">
-                <a14:hiddenLine xmlns:a14="http://schemas.microsoft.com/office/drawing/2010/main" xmlns="" w="9525">
+                <a14:hiddenLine xmlns="" xmlns:a14="http://schemas.microsoft.com/office/drawing/2010/main" w="9525">
                   <a:solidFill>
                     <a:srgbClr val="000000"/>
                   </a:solidFill>
@@ -5655,7 +6062,7 @@
             </a:ln>
             <a:extLst>
               <a:ext uri="{91240B29-F687-4f45-9708-019B960494DF}">
-                <a14:hiddenLine xmlns:a14="http://schemas.microsoft.com/office/drawing/2010/main" xmlns="" w="9525">
+                <a14:hiddenLine xmlns="" xmlns:a14="http://schemas.microsoft.com/office/drawing/2010/main" w="9525">
                   <a:solidFill>
                     <a:srgbClr val="000000"/>
                   </a:solidFill>
@@ -5745,7 +6152,7 @@
             </a:ln>
             <a:extLst>
               <a:ext uri="{91240B29-F687-4f45-9708-019B960494DF}">
-                <a14:hiddenLine xmlns:a14="http://schemas.microsoft.com/office/drawing/2010/main" xmlns="" w="9525">
+                <a14:hiddenLine xmlns="" xmlns:a14="http://schemas.microsoft.com/office/drawing/2010/main" w="9525">
                   <a:solidFill>
                     <a:srgbClr val="000000"/>
                   </a:solidFill>
@@ -5801,7 +6208,7 @@
             </a:ln>
             <a:extLst>
               <a:ext uri="{91240B29-F687-4f45-9708-019B960494DF}">
-                <a14:hiddenLine xmlns:a14="http://schemas.microsoft.com/office/drawing/2010/main" xmlns="" w="9525">
+                <a14:hiddenLine xmlns="" xmlns:a14="http://schemas.microsoft.com/office/drawing/2010/main" w="9525">
                   <a:solidFill>
                     <a:srgbClr val="000000"/>
                   </a:solidFill>
@@ -5891,7 +6298,7 @@
             </a:ln>
             <a:extLst>
               <a:ext uri="{91240B29-F687-4f45-9708-019B960494DF}">
-                <a14:hiddenLine xmlns:a14="http://schemas.microsoft.com/office/drawing/2010/main" xmlns="" w="9525">
+                <a14:hiddenLine xmlns="" xmlns:a14="http://schemas.microsoft.com/office/drawing/2010/main" w="9525">
                   <a:solidFill>
                     <a:srgbClr val="000000"/>
                   </a:solidFill>
@@ -5947,7 +6354,7 @@
             </a:ln>
             <a:extLst>
               <a:ext uri="{91240B29-F687-4f45-9708-019B960494DF}">
-                <a14:hiddenLine xmlns:a14="http://schemas.microsoft.com/office/drawing/2010/main" xmlns="" w="9525">
+                <a14:hiddenLine xmlns="" xmlns:a14="http://schemas.microsoft.com/office/drawing/2010/main" w="9525">
                   <a:solidFill>
                     <a:srgbClr val="000000"/>
                   </a:solidFill>
@@ -6037,7 +6444,7 @@
             </a:ln>
             <a:extLst>
               <a:ext uri="{91240B29-F687-4f45-9708-019B960494DF}">
-                <a14:hiddenLine xmlns:a14="http://schemas.microsoft.com/office/drawing/2010/main" xmlns="" w="9525">
+                <a14:hiddenLine xmlns="" xmlns:a14="http://schemas.microsoft.com/office/drawing/2010/main" w="9525">
                   <a:solidFill>
                     <a:srgbClr val="000000"/>
                   </a:solidFill>
@@ -6105,7 +6512,7 @@
             </a:ln>
             <a:extLst>
               <a:ext uri="{91240B29-F687-4f45-9708-019B960494DF}">
-                <a14:hiddenLine xmlns:a14="http://schemas.microsoft.com/office/drawing/2010/main" xmlns="" w="9525">
+                <a14:hiddenLine xmlns="" xmlns:a14="http://schemas.microsoft.com/office/drawing/2010/main" w="9525">
                   <a:solidFill>
                     <a:srgbClr val="000000"/>
                   </a:solidFill>
@@ -6195,7 +6602,7 @@
             </a:ln>
             <a:extLst>
               <a:ext uri="{91240B29-F687-4f45-9708-019B960494DF}">
-                <a14:hiddenLine xmlns:a14="http://schemas.microsoft.com/office/drawing/2010/main" xmlns="" w="9525">
+                <a14:hiddenLine xmlns="" xmlns:a14="http://schemas.microsoft.com/office/drawing/2010/main" w="9525">
                   <a:solidFill>
                     <a:srgbClr val="000000"/>
                   </a:solidFill>
@@ -6263,7 +6670,7 @@
             </a:ln>
             <a:extLst>
               <a:ext uri="{91240B29-F687-4f45-9708-019B960494DF}">
-                <a14:hiddenLine xmlns:a14="http://schemas.microsoft.com/office/drawing/2010/main" xmlns="" w="9525">
+                <a14:hiddenLine xmlns="" xmlns:a14="http://schemas.microsoft.com/office/drawing/2010/main" w="9525">
                   <a:solidFill>
                     <a:srgbClr val="000000"/>
                   </a:solidFill>
@@ -6353,7 +6760,7 @@
             </a:ln>
             <a:extLst>
               <a:ext uri="{91240B29-F687-4f45-9708-019B960494DF}">
-                <a14:hiddenLine xmlns:a14="http://schemas.microsoft.com/office/drawing/2010/main" xmlns="" w="9525">
+                <a14:hiddenLine xmlns="" xmlns:a14="http://schemas.microsoft.com/office/drawing/2010/main" w="9525">
                   <a:solidFill>
                     <a:srgbClr val="000000"/>
                   </a:solidFill>
@@ -6387,7 +6794,7 @@
             </a:ln>
             <a:extLst>
               <a:ext uri="{91240B29-F687-4f45-9708-019B960494DF}">
-                <a14:hiddenLine xmlns:a14="http://schemas.microsoft.com/office/drawing/2010/main" xmlns="" w="9525">
+                <a14:hiddenLine xmlns="" xmlns:a14="http://schemas.microsoft.com/office/drawing/2010/main" w="9525">
                   <a:solidFill>
                     <a:srgbClr val="000000"/>
                   </a:solidFill>
@@ -6477,7 +6884,7 @@
             </a:ln>
             <a:extLst>
               <a:ext uri="{91240B29-F687-4f45-9708-019B960494DF}">
-                <a14:hiddenLine xmlns:a14="http://schemas.microsoft.com/office/drawing/2010/main" xmlns="" w="9525">
+                <a14:hiddenLine xmlns="" xmlns:a14="http://schemas.microsoft.com/office/drawing/2010/main" w="9525">
                   <a:solidFill>
                     <a:srgbClr val="000000"/>
                   </a:solidFill>
@@ -6539,7 +6946,7 @@
             </a:ln>
             <a:extLst>
               <a:ext uri="{91240B29-F687-4f45-9708-019B960494DF}">
-                <a14:hiddenLine xmlns:a14="http://schemas.microsoft.com/office/drawing/2010/main" xmlns="" w="9525">
+                <a14:hiddenLine xmlns="" xmlns:a14="http://schemas.microsoft.com/office/drawing/2010/main" w="9525">
                   <a:solidFill>
                     <a:srgbClr val="000000"/>
                   </a:solidFill>
@@ -6601,7 +7008,7 @@
             </a:ln>
             <a:extLst>
               <a:ext uri="{91240B29-F687-4f45-9708-019B960494DF}">
-                <a14:hiddenLine xmlns:a14="http://schemas.microsoft.com/office/drawing/2010/main" xmlns="" w="9525">
+                <a14:hiddenLine xmlns="" xmlns:a14="http://schemas.microsoft.com/office/drawing/2010/main" w="9525">
                   <a:solidFill>
                     <a:srgbClr val="000000"/>
                   </a:solidFill>
@@ -6691,7 +7098,7 @@
             </a:ln>
             <a:extLst>
               <a:ext uri="{91240B29-F687-4f45-9708-019B960494DF}">
-                <a14:hiddenLine xmlns:a14="http://schemas.microsoft.com/office/drawing/2010/main" xmlns="" w="9525">
+                <a14:hiddenLine xmlns="" xmlns:a14="http://schemas.microsoft.com/office/drawing/2010/main" w="9525">
                   <a:solidFill>
                     <a:srgbClr val="000000"/>
                   </a:solidFill>
@@ -6759,7 +7166,7 @@
             </a:ln>
             <a:extLst>
               <a:ext uri="{91240B29-F687-4f45-9708-019B960494DF}">
-                <a14:hiddenLine xmlns:a14="http://schemas.microsoft.com/office/drawing/2010/main" xmlns="" w="9525">
+                <a14:hiddenLine xmlns="" xmlns:a14="http://schemas.microsoft.com/office/drawing/2010/main" w="9525">
                   <a:solidFill>
                     <a:srgbClr val="000000"/>
                   </a:solidFill>
@@ -6821,7 +7228,7 @@
             </a:ln>
             <a:extLst>
               <a:ext uri="{91240B29-F687-4f45-9708-019B960494DF}">
-                <a14:hiddenLine xmlns:a14="http://schemas.microsoft.com/office/drawing/2010/main" xmlns="" w="9525">
+                <a14:hiddenLine xmlns="" xmlns:a14="http://schemas.microsoft.com/office/drawing/2010/main" w="9525">
                   <a:solidFill>
                     <a:srgbClr val="000000"/>
                   </a:solidFill>
@@ -6911,7 +7318,7 @@
             </a:ln>
             <a:extLst>
               <a:ext uri="{91240B29-F687-4f45-9708-019B960494DF}">
-                <a14:hiddenLine xmlns:a14="http://schemas.microsoft.com/office/drawing/2010/main" xmlns="" w="9525">
+                <a14:hiddenLine xmlns="" xmlns:a14="http://schemas.microsoft.com/office/drawing/2010/main" w="9525">
                   <a:solidFill>
                     <a:srgbClr val="000000"/>
                   </a:solidFill>
@@ -6973,7 +7380,7 @@
             </a:ln>
             <a:extLst>
               <a:ext uri="{91240B29-F687-4f45-9708-019B960494DF}">
-                <a14:hiddenLine xmlns:a14="http://schemas.microsoft.com/office/drawing/2010/main" xmlns="" w="9525">
+                <a14:hiddenLine xmlns="" xmlns:a14="http://schemas.microsoft.com/office/drawing/2010/main" w="9525">
                   <a:solidFill>
                     <a:srgbClr val="000000"/>
                   </a:solidFill>
@@ -7063,7 +7470,7 @@
             </a:ln>
             <a:extLst>
               <a:ext uri="{91240B29-F687-4f45-9708-019B960494DF}">
-                <a14:hiddenLine xmlns:a14="http://schemas.microsoft.com/office/drawing/2010/main" xmlns="" w="9525">
+                <a14:hiddenLine xmlns="" xmlns:a14="http://schemas.microsoft.com/office/drawing/2010/main" w="9525">
                   <a:solidFill>
                     <a:srgbClr val="000000"/>
                   </a:solidFill>
@@ -7125,7 +7532,7 @@
             </a:ln>
             <a:extLst>
               <a:ext uri="{91240B29-F687-4f45-9708-019B960494DF}">
-                <a14:hiddenLine xmlns:a14="http://schemas.microsoft.com/office/drawing/2010/main" xmlns="" w="9525">
+                <a14:hiddenLine xmlns="" xmlns:a14="http://schemas.microsoft.com/office/drawing/2010/main" w="9525">
                   <a:solidFill>
                     <a:srgbClr val="000000"/>
                   </a:solidFill>
@@ -7215,7 +7622,7 @@
             </a:ln>
             <a:extLst>
               <a:ext uri="{91240B29-F687-4f45-9708-019B960494DF}">
-                <a14:hiddenLine xmlns:a14="http://schemas.microsoft.com/office/drawing/2010/main" xmlns="" w="9525">
+                <a14:hiddenLine xmlns="" xmlns:a14="http://schemas.microsoft.com/office/drawing/2010/main" w="9525">
                   <a:solidFill>
                     <a:srgbClr val="000000"/>
                   </a:solidFill>
@@ -7249,7 +7656,7 @@
             </a:ln>
             <a:extLst>
               <a:ext uri="{91240B29-F687-4f45-9708-019B960494DF}">
-                <a14:hiddenLine xmlns:a14="http://schemas.microsoft.com/office/drawing/2010/main" xmlns="" w="9525">
+                <a14:hiddenLine xmlns="" xmlns:a14="http://schemas.microsoft.com/office/drawing/2010/main" w="9525">
                   <a:solidFill>
                     <a:srgbClr val="000000"/>
                   </a:solidFill>
@@ -7314,7 +7721,7 @@
             </a:ln>
             <a:extLst>
               <a:ext uri="{91240B29-F687-4f45-9708-019B960494DF}">
-                <a14:hiddenLine xmlns:a14="http://schemas.microsoft.com/office/drawing/2010/main" xmlns="" w="9525">
+                <a14:hiddenLine xmlns="" xmlns:a14="http://schemas.microsoft.com/office/drawing/2010/main" w="9525">
                   <a:solidFill>
                     <a:srgbClr val="000000"/>
                   </a:solidFill>
@@ -7404,7 +7811,7 @@
             </a:ln>
             <a:extLst>
               <a:ext uri="{91240B29-F687-4f45-9708-019B960494DF}">
-                <a14:hiddenLine xmlns:a14="http://schemas.microsoft.com/office/drawing/2010/main" xmlns="" w="9525">
+                <a14:hiddenLine xmlns="" xmlns:a14="http://schemas.microsoft.com/office/drawing/2010/main" w="9525">
                   <a:solidFill>
                     <a:srgbClr val="000000"/>
                   </a:solidFill>
@@ -7466,7 +7873,7 @@
             </a:ln>
             <a:extLst>
               <a:ext uri="{91240B29-F687-4f45-9708-019B960494DF}">
-                <a14:hiddenLine xmlns:a14="http://schemas.microsoft.com/office/drawing/2010/main" xmlns="" w="9525">
+                <a14:hiddenLine xmlns="" xmlns:a14="http://schemas.microsoft.com/office/drawing/2010/main" w="9525">
                   <a:solidFill>
                     <a:srgbClr val="000000"/>
                   </a:solidFill>
@@ -7556,7 +7963,7 @@
             </a:ln>
             <a:extLst>
               <a:ext uri="{91240B29-F687-4f45-9708-019B960494DF}">
-                <a14:hiddenLine xmlns:a14="http://schemas.microsoft.com/office/drawing/2010/main" xmlns="" w="9525">
+                <a14:hiddenLine xmlns="" xmlns:a14="http://schemas.microsoft.com/office/drawing/2010/main" w="9525">
                   <a:solidFill>
                     <a:srgbClr val="000000"/>
                   </a:solidFill>
@@ -7646,7 +8053,7 @@
             </a:ln>
             <a:extLst>
               <a:ext uri="{91240B29-F687-4f45-9708-019B960494DF}">
-                <a14:hiddenLine xmlns:a14="http://schemas.microsoft.com/office/drawing/2010/main" xmlns="" w="9525">
+                <a14:hiddenLine xmlns="" xmlns:a14="http://schemas.microsoft.com/office/drawing/2010/main" w="9525">
                   <a:solidFill>
                     <a:srgbClr val="000000"/>
                   </a:solidFill>
@@ -7711,7 +8118,7 @@
             </a:ln>
             <a:extLst>
               <a:ext uri="{91240B29-F687-4f45-9708-019B960494DF}">
-                <a14:hiddenLine xmlns:a14="http://schemas.microsoft.com/office/drawing/2010/main" xmlns="" w="9525">
+                <a14:hiddenLine xmlns="" xmlns:a14="http://schemas.microsoft.com/office/drawing/2010/main" w="9525">
                   <a:solidFill>
                     <a:srgbClr val="000000"/>
                   </a:solidFill>
@@ -7773,7 +8180,7 @@
             </a:ln>
             <a:extLst>
               <a:ext uri="{91240B29-F687-4f45-9708-019B960494DF}">
-                <a14:hiddenLine xmlns:a14="http://schemas.microsoft.com/office/drawing/2010/main" xmlns="" w="9525">
+                <a14:hiddenLine xmlns="" xmlns:a14="http://schemas.microsoft.com/office/drawing/2010/main" w="9525">
                   <a:solidFill>
                     <a:srgbClr val="000000"/>
                   </a:solidFill>
@@ -7863,7 +8270,7 @@
             </a:ln>
             <a:extLst>
               <a:ext uri="{91240B29-F687-4f45-9708-019B960494DF}">
-                <a14:hiddenLine xmlns:a14="http://schemas.microsoft.com/office/drawing/2010/main" xmlns="" w="9525">
+                <a14:hiddenLine xmlns="" xmlns:a14="http://schemas.microsoft.com/office/drawing/2010/main" w="9525">
                   <a:solidFill>
                     <a:srgbClr val="000000"/>
                   </a:solidFill>
@@ -7953,7 +8360,7 @@
             </a:ln>
             <a:extLst>
               <a:ext uri="{91240B29-F687-4f45-9708-019B960494DF}">
-                <a14:hiddenLine xmlns:a14="http://schemas.microsoft.com/office/drawing/2010/main" xmlns="" w="9525">
+                <a14:hiddenLine xmlns="" xmlns:a14="http://schemas.microsoft.com/office/drawing/2010/main" w="9525">
                   <a:solidFill>
                     <a:srgbClr val="000000"/>
                   </a:solidFill>
@@ -8015,7 +8422,7 @@
             </a:ln>
             <a:extLst>
               <a:ext uri="{91240B29-F687-4f45-9708-019B960494DF}">
-                <a14:hiddenLine xmlns:a14="http://schemas.microsoft.com/office/drawing/2010/main" xmlns="" w="9525">
+                <a14:hiddenLine xmlns="" xmlns:a14="http://schemas.microsoft.com/office/drawing/2010/main" w="9525">
                   <a:solidFill>
                     <a:srgbClr val="000000"/>
                   </a:solidFill>
@@ -8135,7 +8542,7 @@
             </a:ln>
             <a:extLst>
               <a:ext uri="{91240B29-F687-4f45-9708-019B960494DF}">
-                <a14:hiddenLine xmlns:a14="http://schemas.microsoft.com/office/drawing/2010/main" xmlns="" w="9525">
+                <a14:hiddenLine xmlns="" xmlns:a14="http://schemas.microsoft.com/office/drawing/2010/main" w="9525">
                   <a:solidFill>
                     <a:srgbClr val="000000"/>
                   </a:solidFill>
@@ -8203,7 +8610,7 @@
             </a:ln>
             <a:extLst>
               <a:ext uri="{91240B29-F687-4f45-9708-019B960494DF}">
-                <a14:hiddenLine xmlns:a14="http://schemas.microsoft.com/office/drawing/2010/main" xmlns="" w="9525">
+                <a14:hiddenLine xmlns="" xmlns:a14="http://schemas.microsoft.com/office/drawing/2010/main" w="9525">
                   <a:solidFill>
                     <a:srgbClr val="000000"/>
                   </a:solidFill>
@@ -8293,7 +8700,7 @@
             </a:ln>
             <a:extLst>
               <a:ext uri="{91240B29-F687-4f45-9708-019B960494DF}">
-                <a14:hiddenLine xmlns:a14="http://schemas.microsoft.com/office/drawing/2010/main" xmlns="" w="9525">
+                <a14:hiddenLine xmlns="" xmlns:a14="http://schemas.microsoft.com/office/drawing/2010/main" w="9525">
                   <a:solidFill>
                     <a:srgbClr val="000000"/>
                   </a:solidFill>
@@ -8433,7 +8840,7 @@
           <a:p>
             <a:fld id="{48A87A34-81AB-432B-8DAE-1953F412C126}" type="datetimeFigureOut">
               <a:rPr lang="en-US" dirty="0"/>
-              <a:t>6/8/26</a:t>
+              <a:t>6/9/26</a:t>
             </a:fld>
             <a:endParaRPr lang="en-US" dirty="0"/>
           </a:p>
@@ -8695,7 +9102,7 @@
           <a:p>
             <a:fld id="{48A87A34-81AB-432B-8DAE-1953F412C126}" type="datetimeFigureOut">
               <a:rPr lang="en-US" dirty="0"/>
-              <a:t>6/8/26</a:t>
+              <a:t>6/9/26</a:t>
             </a:fld>
             <a:endParaRPr lang="en-US" dirty="0"/>
           </a:p>
@@ -8886,7 +9293,7 @@
           <a:p>
             <a:fld id="{48A87A34-81AB-432B-8DAE-1953F412C126}" type="datetimeFigureOut">
               <a:rPr lang="en-US" dirty="0"/>
-              <a:t>6/8/26</a:t>
+              <a:t>6/9/26</a:t>
             </a:fld>
             <a:endParaRPr lang="en-US" dirty="0"/>
           </a:p>
@@ -9144,7 +9551,7 @@
           <a:p>
             <a:fld id="{48A87A34-81AB-432B-8DAE-1953F412C126}" type="datetimeFigureOut">
               <a:rPr lang="en-US" dirty="0"/>
-              <a:t>6/8/26</a:t>
+              <a:t>6/9/26</a:t>
             </a:fld>
             <a:endParaRPr lang="en-US" dirty="0"/>
           </a:p>
@@ -9573,7 +9980,7 @@
           <a:p>
             <a:fld id="{48A87A34-81AB-432B-8DAE-1953F412C126}" type="datetimeFigureOut">
               <a:rPr lang="en-US" dirty="0"/>
-              <a:t>6/8/26</a:t>
+              <a:t>6/9/26</a:t>
             </a:fld>
             <a:endParaRPr lang="en-US" dirty="0"/>
           </a:p>
@@ -10114,7 +10521,7 @@
           <a:p>
             <a:fld id="{48A87A34-81AB-432B-8DAE-1953F412C126}" type="datetimeFigureOut">
               <a:rPr lang="en-US" dirty="0"/>
-              <a:t>6/8/26</a:t>
+              <a:t>6/9/26</a:t>
             </a:fld>
             <a:endParaRPr lang="en-US" dirty="0"/>
           </a:p>
@@ -10829,7 +11236,7 @@
           <a:p>
             <a:fld id="{48A87A34-81AB-432B-8DAE-1953F412C126}" type="datetimeFigureOut">
               <a:rPr lang="en-US" dirty="0"/>
-              <a:t>6/8/26</a:t>
+              <a:t>6/9/26</a:t>
             </a:fld>
             <a:endParaRPr lang="en-US" dirty="0"/>
           </a:p>
@@ -10994,7 +11401,7 @@
           <a:p>
             <a:fld id="{48A87A34-81AB-432B-8DAE-1953F412C126}" type="datetimeFigureOut">
               <a:rPr lang="en-US" dirty="0"/>
-              <a:t>6/8/26</a:t>
+              <a:t>6/9/26</a:t>
             </a:fld>
             <a:endParaRPr lang="en-US" dirty="0"/>
           </a:p>
@@ -11169,7 +11576,7 @@
           <a:p>
             <a:fld id="{48A87A34-81AB-432B-8DAE-1953F412C126}" type="datetimeFigureOut">
               <a:rPr lang="en-US" dirty="0"/>
-              <a:t>6/8/26</a:t>
+              <a:t>6/9/26</a:t>
             </a:fld>
             <a:endParaRPr lang="en-US" dirty="0"/>
           </a:p>
@@ -11334,7 +11741,7 @@
           <a:p>
             <a:fld id="{48A87A34-81AB-432B-8DAE-1953F412C126}" type="datetimeFigureOut">
               <a:rPr lang="en-US" dirty="0"/>
-              <a:t>6/8/26</a:t>
+              <a:t>6/9/26</a:t>
             </a:fld>
             <a:endParaRPr lang="en-US" dirty="0"/>
           </a:p>
@@ -11579,7 +11986,7 @@
           <a:p>
             <a:fld id="{48A87A34-81AB-432B-8DAE-1953F412C126}" type="datetimeFigureOut">
               <a:rPr lang="en-US" dirty="0"/>
-              <a:t>6/8/26</a:t>
+              <a:t>6/9/26</a:t>
             </a:fld>
             <a:endParaRPr lang="en-US" dirty="0"/>
           </a:p>
@@ -11806,7 +12213,7 @@
           <a:p>
             <a:fld id="{48A87A34-81AB-432B-8DAE-1953F412C126}" type="datetimeFigureOut">
               <a:rPr lang="en-US" dirty="0"/>
-              <a:t>6/8/26</a:t>
+              <a:t>6/9/26</a:t>
             </a:fld>
             <a:endParaRPr lang="en-US" dirty="0"/>
           </a:p>
@@ -12182,7 +12589,7 @@
           <a:p>
             <a:fld id="{48A87A34-81AB-432B-8DAE-1953F412C126}" type="datetimeFigureOut">
               <a:rPr lang="en-US" dirty="0"/>
-              <a:t>6/8/26</a:t>
+              <a:t>6/9/26</a:t>
             </a:fld>
             <a:endParaRPr lang="en-US" dirty="0"/>
           </a:p>
@@ -12295,7 +12702,7 @@
           <a:p>
             <a:fld id="{48A87A34-81AB-432B-8DAE-1953F412C126}" type="datetimeFigureOut">
               <a:rPr lang="en-US" dirty="0"/>
-              <a:t>6/8/26</a:t>
+              <a:t>6/9/26</a:t>
             </a:fld>
             <a:endParaRPr lang="en-US" dirty="0"/>
           </a:p>
@@ -12385,7 +12792,7 @@
           <a:p>
             <a:fld id="{48A87A34-81AB-432B-8DAE-1953F412C126}" type="datetimeFigureOut">
               <a:rPr lang="en-US" dirty="0"/>
-              <a:t>6/8/26</a:t>
+              <a:t>6/9/26</a:t>
             </a:fld>
             <a:endParaRPr lang="en-US" dirty="0"/>
           </a:p>
@@ -12629,7 +13036,7 @@
           <a:p>
             <a:fld id="{48A87A34-81AB-432B-8DAE-1953F412C126}" type="datetimeFigureOut">
               <a:rPr lang="en-US" dirty="0"/>
-              <a:t>6/8/26</a:t>
+              <a:t>6/9/26</a:t>
             </a:fld>
             <a:endParaRPr lang="en-US" dirty="0"/>
           </a:p>
@@ -12904,7 +13311,7 @@
           <a:p>
             <a:fld id="{48A87A34-81AB-432B-8DAE-1953F412C126}" type="datetimeFigureOut">
               <a:rPr lang="en-US" dirty="0"/>
-              <a:t>6/8/26</a:t>
+              <a:t>6/9/26</a:t>
             </a:fld>
             <a:endParaRPr lang="en-US" dirty="0"/>
           </a:p>
@@ -13015,7 +13422,7 @@
           <a:noFill/>
           <a:extLst>
             <a:ext uri="{909E8E84-426E-40dd-AFC4-6F175D3DCCD1}">
-              <a14:hiddenFill xmlns:a14="http://schemas.microsoft.com/office/drawing/2010/main" xmlns="">
+              <a14:hiddenFill xmlns="" xmlns:a14="http://schemas.microsoft.com/office/drawing/2010/main">
                 <a:solidFill>
                   <a:srgbClr val="FFFFFF"/>
                 </a:solidFill>
@@ -13089,7 +13496,7 @@
               </a:ln>
               <a:extLst>
                 <a:ext uri="{91240B29-F687-4f45-9708-019B960494DF}">
-                  <a14:hiddenLine xmlns:a14="http://schemas.microsoft.com/office/drawing/2010/main" xmlns="" w="9525">
+                  <a14:hiddenLine xmlns="" xmlns:a14="http://schemas.microsoft.com/office/drawing/2010/main" w="9525">
                     <a:solidFill>
                       <a:srgbClr val="000000"/>
                     </a:solidFill>
@@ -13179,7 +13586,7 @@
               </a:ln>
               <a:extLst>
                 <a:ext uri="{91240B29-F687-4f45-9708-019B960494DF}">
-                  <a14:hiddenLine xmlns:a14="http://schemas.microsoft.com/office/drawing/2010/main" xmlns="" w="9525">
+                  <a14:hiddenLine xmlns="" xmlns:a14="http://schemas.microsoft.com/office/drawing/2010/main" w="9525">
                     <a:solidFill>
                       <a:srgbClr val="000000"/>
                     </a:solidFill>
@@ -13269,7 +13676,7 @@
               </a:ln>
               <a:extLst>
                 <a:ext uri="{91240B29-F687-4f45-9708-019B960494DF}">
-                  <a14:hiddenLine xmlns:a14="http://schemas.microsoft.com/office/drawing/2010/main" xmlns="" w="9525">
+                  <a14:hiddenLine xmlns="" xmlns:a14="http://schemas.microsoft.com/office/drawing/2010/main" w="9525">
                     <a:solidFill>
                       <a:srgbClr val="000000"/>
                     </a:solidFill>
@@ -13331,7 +13738,7 @@
               </a:ln>
               <a:extLst>
                 <a:ext uri="{91240B29-F687-4f45-9708-019B960494DF}">
-                  <a14:hiddenLine xmlns:a14="http://schemas.microsoft.com/office/drawing/2010/main" xmlns="" w="9525">
+                  <a14:hiddenLine xmlns="" xmlns:a14="http://schemas.microsoft.com/office/drawing/2010/main" w="9525">
                     <a:solidFill>
                       <a:srgbClr val="000000"/>
                     </a:solidFill>
@@ -13421,7 +13828,7 @@
               </a:ln>
               <a:extLst>
                 <a:ext uri="{91240B29-F687-4f45-9708-019B960494DF}">
-                  <a14:hiddenLine xmlns:a14="http://schemas.microsoft.com/office/drawing/2010/main" xmlns="" w="9525">
+                  <a14:hiddenLine xmlns="" xmlns:a14="http://schemas.microsoft.com/office/drawing/2010/main" w="9525">
                     <a:solidFill>
                       <a:srgbClr val="000000"/>
                     </a:solidFill>
@@ -13483,7 +13890,7 @@
               </a:ln>
               <a:extLst>
                 <a:ext uri="{91240B29-F687-4f45-9708-019B960494DF}">
-                  <a14:hiddenLine xmlns:a14="http://schemas.microsoft.com/office/drawing/2010/main" xmlns="" w="9525">
+                  <a14:hiddenLine xmlns="" xmlns:a14="http://schemas.microsoft.com/office/drawing/2010/main" w="9525">
                     <a:solidFill>
                       <a:srgbClr val="000000"/>
                     </a:solidFill>
@@ -13545,7 +13952,7 @@
               </a:ln>
               <a:extLst>
                 <a:ext uri="{91240B29-F687-4f45-9708-019B960494DF}">
-                  <a14:hiddenLine xmlns:a14="http://schemas.microsoft.com/office/drawing/2010/main" xmlns="" w="9525">
+                  <a14:hiddenLine xmlns="" xmlns:a14="http://schemas.microsoft.com/office/drawing/2010/main" w="9525">
                     <a:solidFill>
                       <a:srgbClr val="000000"/>
                     </a:solidFill>
@@ -13635,7 +14042,7 @@
               </a:ln>
               <a:extLst>
                 <a:ext uri="{91240B29-F687-4f45-9708-019B960494DF}">
-                  <a14:hiddenLine xmlns:a14="http://schemas.microsoft.com/office/drawing/2010/main" xmlns="" w="9525">
+                  <a14:hiddenLine xmlns="" xmlns:a14="http://schemas.microsoft.com/office/drawing/2010/main" w="9525">
                     <a:solidFill>
                       <a:srgbClr val="000000"/>
                     </a:solidFill>
@@ -13725,7 +14132,7 @@
               </a:ln>
               <a:extLst>
                 <a:ext uri="{91240B29-F687-4f45-9708-019B960494DF}">
-                  <a14:hiddenLine xmlns:a14="http://schemas.microsoft.com/office/drawing/2010/main" xmlns="" w="9525">
+                  <a14:hiddenLine xmlns="" xmlns:a14="http://schemas.microsoft.com/office/drawing/2010/main" w="9525">
                     <a:solidFill>
                       <a:srgbClr val="000000"/>
                     </a:solidFill>
@@ -13787,7 +14194,7 @@
               </a:ln>
               <a:extLst>
                 <a:ext uri="{91240B29-F687-4f45-9708-019B960494DF}">
-                  <a14:hiddenLine xmlns:a14="http://schemas.microsoft.com/office/drawing/2010/main" xmlns="" w="9525">
+                  <a14:hiddenLine xmlns="" xmlns:a14="http://schemas.microsoft.com/office/drawing/2010/main" w="9525">
                     <a:solidFill>
                       <a:srgbClr val="000000"/>
                     </a:solidFill>
@@ -13897,7 +14304,7 @@
               </a:ln>
               <a:extLst>
                 <a:ext uri="{91240B29-F687-4f45-9708-019B960494DF}">
-                  <a14:hiddenLine xmlns:a14="http://schemas.microsoft.com/office/drawing/2010/main" xmlns="" w="9525">
+                  <a14:hiddenLine xmlns="" xmlns:a14="http://schemas.microsoft.com/office/drawing/2010/main" w="9525">
                     <a:solidFill>
                       <a:srgbClr val="000000"/>
                     </a:solidFill>
@@ -13981,7 +14388,7 @@
               </a:ln>
               <a:extLst>
                 <a:ext uri="{91240B29-F687-4f45-9708-019B960494DF}">
-                  <a14:hiddenLine xmlns:a14="http://schemas.microsoft.com/office/drawing/2010/main" xmlns="" w="9525">
+                  <a14:hiddenLine xmlns="" xmlns:a14="http://schemas.microsoft.com/office/drawing/2010/main" w="9525">
                     <a:solidFill>
                       <a:srgbClr val="000000"/>
                     </a:solidFill>
@@ -14043,7 +14450,7 @@
               </a:ln>
               <a:extLst>
                 <a:ext uri="{91240B29-F687-4f45-9708-019B960494DF}">
-                  <a14:hiddenLine xmlns:a14="http://schemas.microsoft.com/office/drawing/2010/main" xmlns="" w="9525">
+                  <a14:hiddenLine xmlns="" xmlns:a14="http://schemas.microsoft.com/office/drawing/2010/main" w="9525">
                     <a:solidFill>
                       <a:srgbClr val="000000"/>
                     </a:solidFill>
@@ -14105,7 +14512,7 @@
               </a:ln>
               <a:extLst>
                 <a:ext uri="{91240B29-F687-4f45-9708-019B960494DF}">
-                  <a14:hiddenLine xmlns:a14="http://schemas.microsoft.com/office/drawing/2010/main" xmlns="" w="9525">
+                  <a14:hiddenLine xmlns="" xmlns:a14="http://schemas.microsoft.com/office/drawing/2010/main" w="9525">
                     <a:solidFill>
                       <a:srgbClr val="000000"/>
                     </a:solidFill>
@@ -14195,7 +14602,7 @@
               </a:ln>
               <a:extLst>
                 <a:ext uri="{91240B29-F687-4f45-9708-019B960494DF}">
-                  <a14:hiddenLine xmlns:a14="http://schemas.microsoft.com/office/drawing/2010/main" xmlns="" w="9525">
+                  <a14:hiddenLine xmlns="" xmlns:a14="http://schemas.microsoft.com/office/drawing/2010/main" w="9525">
                     <a:solidFill>
                       <a:srgbClr val="000000"/>
                     </a:solidFill>
@@ -14229,7 +14636,7 @@
               </a:ln>
               <a:extLst>
                 <a:ext uri="{91240B29-F687-4f45-9708-019B960494DF}">
-                  <a14:hiddenLine xmlns:a14="http://schemas.microsoft.com/office/drawing/2010/main" xmlns="" w="9525">
+                  <a14:hiddenLine xmlns="" xmlns:a14="http://schemas.microsoft.com/office/drawing/2010/main" w="9525">
                     <a:solidFill>
                       <a:srgbClr val="000000"/>
                     </a:solidFill>
@@ -14294,7 +14701,7 @@
               </a:ln>
               <a:extLst>
                 <a:ext uri="{91240B29-F687-4f45-9708-019B960494DF}">
-                  <a14:hiddenLine xmlns:a14="http://schemas.microsoft.com/office/drawing/2010/main" xmlns="" w="9525">
+                  <a14:hiddenLine xmlns="" xmlns:a14="http://schemas.microsoft.com/office/drawing/2010/main" w="9525">
                     <a:solidFill>
                       <a:srgbClr val="000000"/>
                     </a:solidFill>
@@ -14384,7 +14791,7 @@
               </a:ln>
               <a:extLst>
                 <a:ext uri="{91240B29-F687-4f45-9708-019B960494DF}">
-                  <a14:hiddenLine xmlns:a14="http://schemas.microsoft.com/office/drawing/2010/main" xmlns="" w="9525">
+                  <a14:hiddenLine xmlns="" xmlns:a14="http://schemas.microsoft.com/office/drawing/2010/main" w="9525">
                     <a:solidFill>
                       <a:srgbClr val="000000"/>
                     </a:solidFill>
@@ -14446,7 +14853,7 @@
               </a:ln>
               <a:extLst>
                 <a:ext uri="{91240B29-F687-4f45-9708-019B960494DF}">
-                  <a14:hiddenLine xmlns:a14="http://schemas.microsoft.com/office/drawing/2010/main" xmlns="" w="9525">
+                  <a14:hiddenLine xmlns="" xmlns:a14="http://schemas.microsoft.com/office/drawing/2010/main" w="9525">
                     <a:solidFill>
                       <a:srgbClr val="000000"/>
                     </a:solidFill>
@@ -14536,7 +14943,7 @@
               </a:ln>
               <a:extLst>
                 <a:ext uri="{91240B29-F687-4f45-9708-019B960494DF}">
-                  <a14:hiddenLine xmlns:a14="http://schemas.microsoft.com/office/drawing/2010/main" xmlns="" w="9525">
+                  <a14:hiddenLine xmlns="" xmlns:a14="http://schemas.microsoft.com/office/drawing/2010/main" w="9525">
                     <a:solidFill>
                       <a:srgbClr val="000000"/>
                     </a:solidFill>
@@ -14601,7 +15008,7 @@
               </a:ln>
               <a:extLst>
                 <a:ext uri="{91240B29-F687-4f45-9708-019B960494DF}">
-                  <a14:hiddenLine xmlns:a14="http://schemas.microsoft.com/office/drawing/2010/main" xmlns="" w="9525">
+                  <a14:hiddenLine xmlns="" xmlns:a14="http://schemas.microsoft.com/office/drawing/2010/main" w="9525">
                     <a:solidFill>
                       <a:srgbClr val="000000"/>
                     </a:solidFill>
@@ -14663,7 +15070,7 @@
               </a:ln>
               <a:extLst>
                 <a:ext uri="{91240B29-F687-4f45-9708-019B960494DF}">
-                  <a14:hiddenLine xmlns:a14="http://schemas.microsoft.com/office/drawing/2010/main" xmlns="" w="9525">
+                  <a14:hiddenLine xmlns="" xmlns:a14="http://schemas.microsoft.com/office/drawing/2010/main" w="9525">
                     <a:solidFill>
                       <a:srgbClr val="000000"/>
                     </a:solidFill>
@@ -14753,7 +15160,7 @@
               </a:ln>
               <a:extLst>
                 <a:ext uri="{91240B29-F687-4f45-9708-019B960494DF}">
-                  <a14:hiddenLine xmlns:a14="http://schemas.microsoft.com/office/drawing/2010/main" xmlns="" w="9525">
+                  <a14:hiddenLine xmlns="" xmlns:a14="http://schemas.microsoft.com/office/drawing/2010/main" w="9525">
                     <a:solidFill>
                       <a:srgbClr val="000000"/>
                     </a:solidFill>
@@ -14843,7 +15250,7 @@
               </a:ln>
               <a:extLst>
                 <a:ext uri="{91240B29-F687-4f45-9708-019B960494DF}">
-                  <a14:hiddenLine xmlns:a14="http://schemas.microsoft.com/office/drawing/2010/main" xmlns="" w="9525">
+                  <a14:hiddenLine xmlns="" xmlns:a14="http://schemas.microsoft.com/office/drawing/2010/main" w="9525">
                     <a:solidFill>
                       <a:srgbClr val="000000"/>
                     </a:solidFill>
@@ -14908,7 +15315,7 @@
               </a:ln>
               <a:extLst>
                 <a:ext uri="{91240B29-F687-4f45-9708-019B960494DF}">
-                  <a14:hiddenLine xmlns:a14="http://schemas.microsoft.com/office/drawing/2010/main" xmlns="" w="9525">
+                  <a14:hiddenLine xmlns="" xmlns:a14="http://schemas.microsoft.com/office/drawing/2010/main" w="9525">
                     <a:solidFill>
                       <a:srgbClr val="000000"/>
                     </a:solidFill>
@@ -15028,7 +15435,7 @@
               </a:ln>
               <a:extLst>
                 <a:ext uri="{91240B29-F687-4f45-9708-019B960494DF}">
-                  <a14:hiddenLine xmlns:a14="http://schemas.microsoft.com/office/drawing/2010/main" xmlns="" w="9525">
+                  <a14:hiddenLine xmlns="" xmlns:a14="http://schemas.microsoft.com/office/drawing/2010/main" w="9525">
                     <a:solidFill>
                       <a:srgbClr val="000000"/>
                     </a:solidFill>
@@ -15126,7 +15533,7 @@
               </a:ln>
               <a:extLst>
                 <a:ext uri="{91240B29-F687-4f45-9708-019B960494DF}">
-                  <a14:hiddenLine xmlns:a14="http://schemas.microsoft.com/office/drawing/2010/main" xmlns="" w="9525">
+                  <a14:hiddenLine xmlns="" xmlns:a14="http://schemas.microsoft.com/office/drawing/2010/main" w="9525">
                     <a:solidFill>
                       <a:srgbClr val="000000"/>
                     </a:solidFill>
@@ -15241,7 +15648,7 @@
               </a:ln>
               <a:extLst>
                 <a:ext uri="{91240B29-F687-4f45-9708-019B960494DF}">
-                  <a14:hiddenLine xmlns:a14="http://schemas.microsoft.com/office/drawing/2010/main" xmlns="" w="9525">
+                  <a14:hiddenLine xmlns="" xmlns:a14="http://schemas.microsoft.com/office/drawing/2010/main" w="9525">
                     <a:solidFill>
                       <a:srgbClr val="000000"/>
                     </a:solidFill>
@@ -15331,7 +15738,7 @@
               </a:ln>
               <a:extLst>
                 <a:ext uri="{91240B29-F687-4f45-9708-019B960494DF}">
-                  <a14:hiddenLine xmlns:a14="http://schemas.microsoft.com/office/drawing/2010/main" xmlns="" w="9525">
+                  <a14:hiddenLine xmlns="" xmlns:a14="http://schemas.microsoft.com/office/drawing/2010/main" w="9525">
                     <a:solidFill>
                       <a:srgbClr val="000000"/>
                     </a:solidFill>
@@ -15396,7 +15803,7 @@
               </a:ln>
               <a:extLst>
                 <a:ext uri="{91240B29-F687-4f45-9708-019B960494DF}">
-                  <a14:hiddenLine xmlns:a14="http://schemas.microsoft.com/office/drawing/2010/main" xmlns="" w="9525">
+                  <a14:hiddenLine xmlns="" xmlns:a14="http://schemas.microsoft.com/office/drawing/2010/main" w="9525">
                     <a:solidFill>
                       <a:srgbClr val="000000"/>
                     </a:solidFill>
@@ -15486,7 +15893,7 @@
               </a:ln>
               <a:extLst>
                 <a:ext uri="{91240B29-F687-4f45-9708-019B960494DF}">
-                  <a14:hiddenLine xmlns:a14="http://schemas.microsoft.com/office/drawing/2010/main" xmlns="" w="9525">
+                  <a14:hiddenLine xmlns="" xmlns:a14="http://schemas.microsoft.com/office/drawing/2010/main" w="9525">
                     <a:solidFill>
                       <a:srgbClr val="000000"/>
                     </a:solidFill>
@@ -15554,7 +15961,7 @@
               </a:ln>
               <a:extLst>
                 <a:ext uri="{91240B29-F687-4f45-9708-019B960494DF}">
-                  <a14:hiddenLine xmlns:a14="http://schemas.microsoft.com/office/drawing/2010/main" xmlns="" w="9525">
+                  <a14:hiddenLine xmlns="" xmlns:a14="http://schemas.microsoft.com/office/drawing/2010/main" w="9525">
                     <a:solidFill>
                       <a:srgbClr val="000000"/>
                     </a:solidFill>
@@ -15644,7 +16051,7 @@
               </a:ln>
               <a:extLst>
                 <a:ext uri="{91240B29-F687-4f45-9708-019B960494DF}">
-                  <a14:hiddenLine xmlns:a14="http://schemas.microsoft.com/office/drawing/2010/main" xmlns="" w="9525">
+                  <a14:hiddenLine xmlns="" xmlns:a14="http://schemas.microsoft.com/office/drawing/2010/main" w="9525">
                     <a:solidFill>
                       <a:srgbClr val="000000"/>
                     </a:solidFill>
@@ -15712,7 +16119,7 @@
               </a:ln>
               <a:extLst>
                 <a:ext uri="{91240B29-F687-4f45-9708-019B960494DF}">
-                  <a14:hiddenLine xmlns:a14="http://schemas.microsoft.com/office/drawing/2010/main" xmlns="" w="9525">
+                  <a14:hiddenLine xmlns="" xmlns:a14="http://schemas.microsoft.com/office/drawing/2010/main" w="9525">
                     <a:solidFill>
                       <a:srgbClr val="000000"/>
                     </a:solidFill>
@@ -15802,7 +16209,7 @@
               </a:ln>
               <a:extLst>
                 <a:ext uri="{91240B29-F687-4f45-9708-019B960494DF}">
-                  <a14:hiddenLine xmlns:a14="http://schemas.microsoft.com/office/drawing/2010/main" xmlns="" w="9525">
+                  <a14:hiddenLine xmlns="" xmlns:a14="http://schemas.microsoft.com/office/drawing/2010/main" w="9525">
                     <a:solidFill>
                       <a:srgbClr val="000000"/>
                     </a:solidFill>
@@ -15836,7 +16243,7 @@
               </a:ln>
               <a:extLst>
                 <a:ext uri="{91240B29-F687-4f45-9708-019B960494DF}">
-                  <a14:hiddenLine xmlns:a14="http://schemas.microsoft.com/office/drawing/2010/main" xmlns="" w="9525">
+                  <a14:hiddenLine xmlns="" xmlns:a14="http://schemas.microsoft.com/office/drawing/2010/main" w="9525">
                     <a:solidFill>
                       <a:srgbClr val="000000"/>
                     </a:solidFill>
@@ -15977,7 +16384,7 @@
             <a:fld id="{48A87A34-81AB-432B-8DAE-1953F412C126}" type="datetimeFigureOut">
               <a:rPr lang="en-US" dirty="0"/>
               <a:pPr/>
-              <a:t>6/8/26</a:t>
+              <a:t>6/9/26</a:t>
             </a:fld>
             <a:endParaRPr lang="en-US" dirty="0"/>
           </a:p>
@@ -16644,7 +17051,7 @@
           <a:noFill/>
           <a:extLst>
             <a:ext uri="{909E8E84-426E-40dd-AFC4-6F175D3DCCD1}">
-              <a14:hiddenFill xmlns="" xmlns:a16="http://schemas.microsoft.com/office/drawing/2014/main" xmlns:p14="http://schemas.microsoft.com/office/powerpoint/2010/main" xmlns:a14="http://schemas.microsoft.com/office/drawing/2010/main">
+              <a14:hiddenFill xmlns:a14="http://schemas.microsoft.com/office/drawing/2010/main" xmlns:p14="http://schemas.microsoft.com/office/powerpoint/2010/main" xmlns:a16="http://schemas.microsoft.com/office/drawing/2014/main" xmlns="">
                 <a:solidFill>
                   <a:srgbClr val="FFFFFF"/>
                 </a:solidFill>
@@ -16716,7 +17123,7 @@
           </a:bodyPr>
           <a:lstStyle/>
           <a:p>
-            <a:endParaRPr lang="en-US" sz="2000"/>
+            <a:endParaRPr lang="en-US" sz="2000" dirty="0"/>
           </a:p>
         </p:txBody>
       </p:sp>
@@ -16853,7 +17260,7 @@
             </a:ln>
             <a:extLst>
               <a:ext uri="{91240B29-F687-4f45-9708-019B960494DF}">
-                <a14:hiddenLine xmlns="" xmlns:a16="http://schemas.microsoft.com/office/drawing/2014/main" xmlns:p14="http://schemas.microsoft.com/office/powerpoint/2010/main" xmlns:a14="http://schemas.microsoft.com/office/drawing/2010/main" w="9525">
+                <a14:hiddenLine xmlns:a14="http://schemas.microsoft.com/office/drawing/2010/main" xmlns:p14="http://schemas.microsoft.com/office/powerpoint/2010/main" xmlns:a16="http://schemas.microsoft.com/office/drawing/2014/main" xmlns="" w="9525">
                   <a:solidFill>
                     <a:srgbClr val="000000"/>
                   </a:solidFill>
@@ -16965,7 +17372,7 @@
             </a:ln>
             <a:extLst>
               <a:ext uri="{91240B29-F687-4f45-9708-019B960494DF}">
-                <a14:hiddenLine xmlns="" xmlns:a16="http://schemas.microsoft.com/office/drawing/2014/main" xmlns:p14="http://schemas.microsoft.com/office/powerpoint/2010/main" xmlns:a14="http://schemas.microsoft.com/office/drawing/2010/main" w="9525">
+                <a14:hiddenLine xmlns:a14="http://schemas.microsoft.com/office/drawing/2010/main" xmlns:p14="http://schemas.microsoft.com/office/powerpoint/2010/main" xmlns:a16="http://schemas.microsoft.com/office/drawing/2014/main" xmlns="" w="9525">
                   <a:solidFill>
                     <a:srgbClr val="000000"/>
                   </a:solidFill>
@@ -17077,7 +17484,7 @@
             </a:ln>
             <a:extLst>
               <a:ext uri="{91240B29-F687-4f45-9708-019B960494DF}">
-                <a14:hiddenLine xmlns="" xmlns:a16="http://schemas.microsoft.com/office/drawing/2014/main" xmlns:p14="http://schemas.microsoft.com/office/powerpoint/2010/main" xmlns:a14="http://schemas.microsoft.com/office/drawing/2010/main" w="9525">
+                <a14:hiddenLine xmlns:a14="http://schemas.microsoft.com/office/drawing/2010/main" xmlns:p14="http://schemas.microsoft.com/office/powerpoint/2010/main" xmlns:a16="http://schemas.microsoft.com/office/drawing/2014/main" xmlns="" w="9525">
                   <a:solidFill>
                     <a:srgbClr val="000000"/>
                   </a:solidFill>
@@ -17161,7 +17568,7 @@
             </a:ln>
             <a:extLst>
               <a:ext uri="{91240B29-F687-4f45-9708-019B960494DF}">
-                <a14:hiddenLine xmlns="" xmlns:a16="http://schemas.microsoft.com/office/drawing/2014/main" xmlns:p14="http://schemas.microsoft.com/office/powerpoint/2010/main" xmlns:a14="http://schemas.microsoft.com/office/drawing/2010/main" w="9525">
+                <a14:hiddenLine xmlns:a14="http://schemas.microsoft.com/office/drawing/2010/main" xmlns:p14="http://schemas.microsoft.com/office/powerpoint/2010/main" xmlns:a16="http://schemas.microsoft.com/office/drawing/2014/main" xmlns="" w="9525">
                   <a:solidFill>
                     <a:srgbClr val="000000"/>
                   </a:solidFill>
@@ -17273,7 +17680,7 @@
             </a:ln>
             <a:extLst>
               <a:ext uri="{91240B29-F687-4f45-9708-019B960494DF}">
-                <a14:hiddenLine xmlns="" xmlns:a16="http://schemas.microsoft.com/office/drawing/2014/main" xmlns:p14="http://schemas.microsoft.com/office/powerpoint/2010/main" xmlns:a14="http://schemas.microsoft.com/office/drawing/2010/main" w="9525">
+                <a14:hiddenLine xmlns:a14="http://schemas.microsoft.com/office/drawing/2010/main" xmlns:p14="http://schemas.microsoft.com/office/powerpoint/2010/main" xmlns:a16="http://schemas.microsoft.com/office/drawing/2014/main" xmlns="" w="9525">
                   <a:solidFill>
                     <a:srgbClr val="000000"/>
                   </a:solidFill>
@@ -17357,7 +17764,7 @@
             </a:ln>
             <a:extLst>
               <a:ext uri="{91240B29-F687-4f45-9708-019B960494DF}">
-                <a14:hiddenLine xmlns="" xmlns:a16="http://schemas.microsoft.com/office/drawing/2014/main" xmlns:p14="http://schemas.microsoft.com/office/powerpoint/2010/main" xmlns:a14="http://schemas.microsoft.com/office/drawing/2010/main" w="9525">
+                <a14:hiddenLine xmlns:a14="http://schemas.microsoft.com/office/drawing/2010/main" xmlns:p14="http://schemas.microsoft.com/office/powerpoint/2010/main" xmlns:a16="http://schemas.microsoft.com/office/drawing/2014/main" xmlns="" w="9525">
                   <a:solidFill>
                     <a:srgbClr val="000000"/>
                   </a:solidFill>
@@ -17441,7 +17848,7 @@
             </a:ln>
             <a:extLst>
               <a:ext uri="{91240B29-F687-4f45-9708-019B960494DF}">
-                <a14:hiddenLine xmlns="" xmlns:a16="http://schemas.microsoft.com/office/drawing/2014/main" xmlns:p14="http://schemas.microsoft.com/office/powerpoint/2010/main" xmlns:a14="http://schemas.microsoft.com/office/drawing/2010/main" w="9525">
+                <a14:hiddenLine xmlns:a14="http://schemas.microsoft.com/office/drawing/2010/main" xmlns:p14="http://schemas.microsoft.com/office/powerpoint/2010/main" xmlns:a16="http://schemas.microsoft.com/office/drawing/2014/main" xmlns="" w="9525">
                   <a:solidFill>
                     <a:srgbClr val="000000"/>
                   </a:solidFill>
@@ -17553,7 +17960,7 @@
             </a:ln>
             <a:extLst>
               <a:ext uri="{91240B29-F687-4f45-9708-019B960494DF}">
-                <a14:hiddenLine xmlns="" xmlns:a16="http://schemas.microsoft.com/office/drawing/2014/main" xmlns:p14="http://schemas.microsoft.com/office/powerpoint/2010/main" xmlns:a14="http://schemas.microsoft.com/office/drawing/2010/main" w="9525">
+                <a14:hiddenLine xmlns:a14="http://schemas.microsoft.com/office/drawing/2010/main" xmlns:p14="http://schemas.microsoft.com/office/powerpoint/2010/main" xmlns:a16="http://schemas.microsoft.com/office/drawing/2014/main" xmlns="" w="9525">
                   <a:solidFill>
                     <a:srgbClr val="000000"/>
                   </a:solidFill>
@@ -17665,7 +18072,7 @@
             </a:ln>
             <a:extLst>
               <a:ext uri="{91240B29-F687-4f45-9708-019B960494DF}">
-                <a14:hiddenLine xmlns="" xmlns:a16="http://schemas.microsoft.com/office/drawing/2014/main" xmlns:p14="http://schemas.microsoft.com/office/powerpoint/2010/main" xmlns:a14="http://schemas.microsoft.com/office/drawing/2010/main" w="9525">
+                <a14:hiddenLine xmlns:a14="http://schemas.microsoft.com/office/drawing/2010/main" xmlns:p14="http://schemas.microsoft.com/office/powerpoint/2010/main" xmlns:a16="http://schemas.microsoft.com/office/drawing/2014/main" xmlns="" w="9525">
                   <a:solidFill>
                     <a:srgbClr val="000000"/>
                   </a:solidFill>
@@ -17749,7 +18156,7 @@
             </a:ln>
             <a:extLst>
               <a:ext uri="{91240B29-F687-4f45-9708-019B960494DF}">
-                <a14:hiddenLine xmlns="" xmlns:a16="http://schemas.microsoft.com/office/drawing/2014/main" xmlns:p14="http://schemas.microsoft.com/office/powerpoint/2010/main" xmlns:a14="http://schemas.microsoft.com/office/drawing/2010/main" w="9525">
+                <a14:hiddenLine xmlns:a14="http://schemas.microsoft.com/office/drawing/2010/main" xmlns:p14="http://schemas.microsoft.com/office/powerpoint/2010/main" xmlns:a16="http://schemas.microsoft.com/office/drawing/2014/main" xmlns="" w="9525">
                   <a:solidFill>
                     <a:srgbClr val="000000"/>
                   </a:solidFill>
@@ -17881,7 +18288,7 @@
             </a:ln>
             <a:extLst>
               <a:ext uri="{91240B29-F687-4f45-9708-019B960494DF}">
-                <a14:hiddenLine xmlns="" xmlns:a16="http://schemas.microsoft.com/office/drawing/2014/main" xmlns:p14="http://schemas.microsoft.com/office/powerpoint/2010/main" xmlns:a14="http://schemas.microsoft.com/office/drawing/2010/main" w="9525">
+                <a14:hiddenLine xmlns:a14="http://schemas.microsoft.com/office/drawing/2010/main" xmlns:p14="http://schemas.microsoft.com/office/powerpoint/2010/main" xmlns:a16="http://schemas.microsoft.com/office/drawing/2014/main" xmlns="" w="9525">
                   <a:solidFill>
                     <a:srgbClr val="000000"/>
                   </a:solidFill>
@@ -18009,7 +18416,7 @@
             </a:ln>
             <a:extLst>
               <a:ext uri="{91240B29-F687-4f45-9708-019B960494DF}">
-                <a14:hiddenLine xmlns="" xmlns:a16="http://schemas.microsoft.com/office/drawing/2014/main" xmlns:p14="http://schemas.microsoft.com/office/powerpoint/2010/main" xmlns:a14="http://schemas.microsoft.com/office/drawing/2010/main" w="9525">
+                <a14:hiddenLine xmlns:a14="http://schemas.microsoft.com/office/drawing/2010/main" xmlns:p14="http://schemas.microsoft.com/office/powerpoint/2010/main" xmlns:a16="http://schemas.microsoft.com/office/drawing/2014/main" xmlns="" w="9525">
                   <a:solidFill>
                     <a:srgbClr val="000000"/>
                   </a:solidFill>
@@ -18093,7 +18500,7 @@
             </a:ln>
             <a:extLst>
               <a:ext uri="{91240B29-F687-4f45-9708-019B960494DF}">
-                <a14:hiddenLine xmlns="" xmlns:a16="http://schemas.microsoft.com/office/drawing/2014/main" xmlns:p14="http://schemas.microsoft.com/office/powerpoint/2010/main" xmlns:a14="http://schemas.microsoft.com/office/drawing/2010/main" w="9525">
+                <a14:hiddenLine xmlns:a14="http://schemas.microsoft.com/office/drawing/2010/main" xmlns:p14="http://schemas.microsoft.com/office/powerpoint/2010/main" xmlns:a16="http://schemas.microsoft.com/office/drawing/2014/main" xmlns="" w="9525">
                   <a:solidFill>
                     <a:srgbClr val="000000"/>
                   </a:solidFill>
@@ -18177,7 +18584,7 @@
             </a:ln>
             <a:extLst>
               <a:ext uri="{91240B29-F687-4f45-9708-019B960494DF}">
-                <a14:hiddenLine xmlns="" xmlns:a16="http://schemas.microsoft.com/office/drawing/2014/main" xmlns:p14="http://schemas.microsoft.com/office/powerpoint/2010/main" xmlns:a14="http://schemas.microsoft.com/office/drawing/2010/main" w="9525">
+                <a14:hiddenLine xmlns:a14="http://schemas.microsoft.com/office/drawing/2010/main" xmlns:p14="http://schemas.microsoft.com/office/powerpoint/2010/main" xmlns:a16="http://schemas.microsoft.com/office/drawing/2014/main" xmlns="" w="9525">
                   <a:solidFill>
                     <a:srgbClr val="000000"/>
                   </a:solidFill>
@@ -18289,7 +18696,7 @@
             </a:ln>
             <a:extLst>
               <a:ext uri="{91240B29-F687-4f45-9708-019B960494DF}">
-                <a14:hiddenLine xmlns="" xmlns:a16="http://schemas.microsoft.com/office/drawing/2014/main" xmlns:p14="http://schemas.microsoft.com/office/powerpoint/2010/main" xmlns:a14="http://schemas.microsoft.com/office/drawing/2010/main" w="9525">
+                <a14:hiddenLine xmlns:a14="http://schemas.microsoft.com/office/drawing/2010/main" xmlns:p14="http://schemas.microsoft.com/office/powerpoint/2010/main" xmlns:a16="http://schemas.microsoft.com/office/drawing/2014/main" xmlns="" w="9525">
                   <a:solidFill>
                     <a:srgbClr val="000000"/>
                   </a:solidFill>
@@ -18345,7 +18752,7 @@
             </a:ln>
             <a:extLst>
               <a:ext uri="{91240B29-F687-4f45-9708-019B960494DF}">
-                <a14:hiddenLine xmlns="" xmlns:a16="http://schemas.microsoft.com/office/drawing/2014/main" xmlns:p14="http://schemas.microsoft.com/office/powerpoint/2010/main" xmlns:a14="http://schemas.microsoft.com/office/drawing/2010/main" w="9525">
+                <a14:hiddenLine xmlns:a14="http://schemas.microsoft.com/office/drawing/2010/main" xmlns:p14="http://schemas.microsoft.com/office/powerpoint/2010/main" xmlns:a16="http://schemas.microsoft.com/office/drawing/2014/main" xmlns="" w="9525">
                   <a:solidFill>
                     <a:srgbClr val="000000"/>
                   </a:solidFill>
@@ -18432,7 +18839,7 @@
             </a:ln>
             <a:extLst>
               <a:ext uri="{91240B29-F687-4f45-9708-019B960494DF}">
-                <a14:hiddenLine xmlns="" xmlns:a16="http://schemas.microsoft.com/office/drawing/2014/main" xmlns:p14="http://schemas.microsoft.com/office/powerpoint/2010/main" xmlns:a14="http://schemas.microsoft.com/office/drawing/2010/main" w="9525">
+                <a14:hiddenLine xmlns:a14="http://schemas.microsoft.com/office/drawing/2010/main" xmlns:p14="http://schemas.microsoft.com/office/powerpoint/2010/main" xmlns:a16="http://schemas.microsoft.com/office/drawing/2014/main" xmlns="" w="9525">
                   <a:solidFill>
                     <a:srgbClr val="000000"/>
                   </a:solidFill>
@@ -18544,7 +18951,7 @@
             </a:ln>
             <a:extLst>
               <a:ext uri="{91240B29-F687-4f45-9708-019B960494DF}">
-                <a14:hiddenLine xmlns="" xmlns:a16="http://schemas.microsoft.com/office/drawing/2014/main" xmlns:p14="http://schemas.microsoft.com/office/powerpoint/2010/main" xmlns:a14="http://schemas.microsoft.com/office/drawing/2010/main" w="9525">
+                <a14:hiddenLine xmlns:a14="http://schemas.microsoft.com/office/drawing/2010/main" xmlns:p14="http://schemas.microsoft.com/office/powerpoint/2010/main" xmlns:a16="http://schemas.microsoft.com/office/drawing/2014/main" xmlns="" w="9525">
                   <a:solidFill>
                     <a:srgbClr val="000000"/>
                   </a:solidFill>
@@ -18628,7 +19035,7 @@
             </a:ln>
             <a:extLst>
               <a:ext uri="{91240B29-F687-4f45-9708-019B960494DF}">
-                <a14:hiddenLine xmlns="" xmlns:a16="http://schemas.microsoft.com/office/drawing/2014/main" xmlns:p14="http://schemas.microsoft.com/office/powerpoint/2010/main" xmlns:a14="http://schemas.microsoft.com/office/drawing/2010/main" w="9525">
+                <a14:hiddenLine xmlns:a14="http://schemas.microsoft.com/office/drawing/2010/main" xmlns:p14="http://schemas.microsoft.com/office/powerpoint/2010/main" xmlns:a16="http://schemas.microsoft.com/office/drawing/2014/main" xmlns="" w="9525">
                   <a:solidFill>
                     <a:srgbClr val="000000"/>
                   </a:solidFill>
@@ -18740,7 +19147,7 @@
             </a:ln>
             <a:extLst>
               <a:ext uri="{91240B29-F687-4f45-9708-019B960494DF}">
-                <a14:hiddenLine xmlns="" xmlns:a16="http://schemas.microsoft.com/office/drawing/2014/main" xmlns:p14="http://schemas.microsoft.com/office/powerpoint/2010/main" xmlns:a14="http://schemas.microsoft.com/office/drawing/2010/main" w="9525">
+                <a14:hiddenLine xmlns:a14="http://schemas.microsoft.com/office/drawing/2010/main" xmlns:p14="http://schemas.microsoft.com/office/powerpoint/2010/main" xmlns:a16="http://schemas.microsoft.com/office/drawing/2014/main" xmlns="" w="9525">
                   <a:solidFill>
                     <a:srgbClr val="000000"/>
                   </a:solidFill>
@@ -18827,7 +19234,7 @@
             </a:ln>
             <a:extLst>
               <a:ext uri="{91240B29-F687-4f45-9708-019B960494DF}">
-                <a14:hiddenLine xmlns="" xmlns:a16="http://schemas.microsoft.com/office/drawing/2014/main" xmlns:p14="http://schemas.microsoft.com/office/powerpoint/2010/main" xmlns:a14="http://schemas.microsoft.com/office/drawing/2010/main" w="9525">
+                <a14:hiddenLine xmlns:a14="http://schemas.microsoft.com/office/drawing/2010/main" xmlns:p14="http://schemas.microsoft.com/office/powerpoint/2010/main" xmlns:a16="http://schemas.microsoft.com/office/drawing/2014/main" xmlns="" w="9525">
                   <a:solidFill>
                     <a:srgbClr val="000000"/>
                   </a:solidFill>
@@ -18911,7 +19318,7 @@
             </a:ln>
             <a:extLst>
               <a:ext uri="{91240B29-F687-4f45-9708-019B960494DF}">
-                <a14:hiddenLine xmlns="" xmlns:a16="http://schemas.microsoft.com/office/drawing/2014/main" xmlns:p14="http://schemas.microsoft.com/office/powerpoint/2010/main" xmlns:a14="http://schemas.microsoft.com/office/drawing/2010/main" w="9525">
+                <a14:hiddenLine xmlns:a14="http://schemas.microsoft.com/office/drawing/2010/main" xmlns:p14="http://schemas.microsoft.com/office/powerpoint/2010/main" xmlns:a16="http://schemas.microsoft.com/office/drawing/2014/main" xmlns="" w="9525">
                   <a:solidFill>
                     <a:srgbClr val="000000"/>
                   </a:solidFill>
@@ -19023,7 +19430,7 @@
             </a:ln>
             <a:extLst>
               <a:ext uri="{91240B29-F687-4f45-9708-019B960494DF}">
-                <a14:hiddenLine xmlns="" xmlns:a16="http://schemas.microsoft.com/office/drawing/2014/main" xmlns:p14="http://schemas.microsoft.com/office/powerpoint/2010/main" xmlns:a14="http://schemas.microsoft.com/office/drawing/2010/main" w="9525">
+                <a14:hiddenLine xmlns:a14="http://schemas.microsoft.com/office/drawing/2010/main" xmlns:p14="http://schemas.microsoft.com/office/powerpoint/2010/main" xmlns:a16="http://schemas.microsoft.com/office/drawing/2014/main" xmlns="" w="9525">
                   <a:solidFill>
                     <a:srgbClr val="000000"/>
                   </a:solidFill>
@@ -19135,7 +19542,7 @@
             </a:ln>
             <a:extLst>
               <a:ext uri="{91240B29-F687-4f45-9708-019B960494DF}">
-                <a14:hiddenLine xmlns="" xmlns:a16="http://schemas.microsoft.com/office/drawing/2014/main" xmlns:p14="http://schemas.microsoft.com/office/powerpoint/2010/main" xmlns:a14="http://schemas.microsoft.com/office/drawing/2010/main" w="9525">
+                <a14:hiddenLine xmlns:a14="http://schemas.microsoft.com/office/drawing/2010/main" xmlns:p14="http://schemas.microsoft.com/office/powerpoint/2010/main" xmlns:a16="http://schemas.microsoft.com/office/drawing/2014/main" xmlns="" w="9525">
                   <a:solidFill>
                     <a:srgbClr val="000000"/>
                   </a:solidFill>
@@ -19222,7 +19629,7 @@
             </a:ln>
             <a:extLst>
               <a:ext uri="{91240B29-F687-4f45-9708-019B960494DF}">
-                <a14:hiddenLine xmlns="" xmlns:a16="http://schemas.microsoft.com/office/drawing/2014/main" xmlns:p14="http://schemas.microsoft.com/office/powerpoint/2010/main" xmlns:a14="http://schemas.microsoft.com/office/drawing/2010/main" w="9525">
+                <a14:hiddenLine xmlns:a14="http://schemas.microsoft.com/office/drawing/2010/main" xmlns:p14="http://schemas.microsoft.com/office/powerpoint/2010/main" xmlns:a16="http://schemas.microsoft.com/office/drawing/2014/main" xmlns="" w="9525">
                   <a:solidFill>
                     <a:srgbClr val="000000"/>
                   </a:solidFill>
@@ -19364,7 +19771,7 @@
             </a:ln>
             <a:extLst>
               <a:ext uri="{91240B29-F687-4f45-9708-019B960494DF}">
-                <a14:hiddenLine xmlns="" xmlns:a16="http://schemas.microsoft.com/office/drawing/2014/main" xmlns:p14="http://schemas.microsoft.com/office/powerpoint/2010/main" xmlns:a14="http://schemas.microsoft.com/office/drawing/2010/main" w="9525">
+                <a14:hiddenLine xmlns:a14="http://schemas.microsoft.com/office/drawing/2010/main" xmlns:p14="http://schemas.microsoft.com/office/powerpoint/2010/main" xmlns:a16="http://schemas.microsoft.com/office/drawing/2014/main" xmlns="" w="9525">
                   <a:solidFill>
                     <a:srgbClr val="000000"/>
                   </a:solidFill>
@@ -21437,7 +21844,7 @@
         <p:spPr/>
         <p:txBody>
           <a:bodyPr>
-            <a:normAutofit lnSpcReduction="10000"/>
+            <a:normAutofit fontScale="92500"/>
           </a:bodyPr>
           <a:lstStyle/>
           <a:p>
@@ -21465,6 +21872,123 @@
               <a:rPr lang="en-US" dirty="0"/>
               <a:t> and a null char insert.</a:t>
             </a:r>
+          </a:p>
+          <a:p>
+            <a:pPr lvl="1"/>
+            <a:r>
+              <a:rPr lang="en-US" dirty="0" err="1"/>
+              <a:t>unsafe_string_dead_store</a:t>
+            </a:r>
+            <a:r>
+              <a:rPr lang="en-US" dirty="0"/>
+              <a:t>: </a:t>
+            </a:r>
+            <a:r>
+              <a:rPr lang="en-US" sz="1800" dirty="0" err="1">
+                <a:solidFill>
+                  <a:srgbClr val="C00000"/>
+                </a:solidFill>
+                <a:latin typeface="SF Pro Rounded Medium" pitchFamily="2" charset="0"/>
+                <a:ea typeface="SF Pro Rounded Medium" pitchFamily="2" charset="0"/>
+                <a:cs typeface="SF Pro Rounded Medium" pitchFamily="2" charset="0"/>
+              </a:rPr>
+              <a:t>strcpy</a:t>
+            </a:r>
+            <a:r>
+              <a:rPr lang="en-US" sz="1800" dirty="0">
+                <a:solidFill>
+                  <a:srgbClr val="C00000"/>
+                </a:solidFill>
+                <a:latin typeface="SF Pro Rounded Medium" pitchFamily="2" charset="0"/>
+                <a:ea typeface="SF Pro Rounded Medium" pitchFamily="2" charset="0"/>
+                <a:cs typeface="SF Pro Rounded Medium" pitchFamily="2" charset="0"/>
+              </a:rPr>
+              <a:t>(</a:t>
+            </a:r>
+            <a:r>
+              <a:rPr lang="en-US" sz="1800" dirty="0" err="1">
+                <a:solidFill>
+                  <a:srgbClr val="C00000"/>
+                </a:solidFill>
+                <a:latin typeface="SF Pro Rounded Medium" pitchFamily="2" charset="0"/>
+                <a:ea typeface="SF Pro Rounded Medium" pitchFamily="2" charset="0"/>
+                <a:cs typeface="SF Pro Rounded Medium" pitchFamily="2" charset="0"/>
+              </a:rPr>
+              <a:t>target,string</a:t>
+            </a:r>
+            <a:r>
+              <a:rPr lang="en-US" sz="1800" dirty="0">
+                <a:solidFill>
+                  <a:srgbClr val="C00000"/>
+                </a:solidFill>
+                <a:latin typeface="SF Pro Rounded Medium" pitchFamily="2" charset="0"/>
+                <a:ea typeface="SF Pro Rounded Medium" pitchFamily="2" charset="0"/>
+                <a:cs typeface="SF Pro Rounded Medium" pitchFamily="2" charset="0"/>
+              </a:rPr>
+              <a:t>); </a:t>
+            </a:r>
+            <a:r>
+              <a:rPr lang="en-US" sz="1800" dirty="0">
+                <a:sym typeface="Wingdings" pitchFamily="2" charset="2"/>
+              </a:rPr>
+              <a:t> </a:t>
+            </a:r>
+            <a:r>
+              <a:rPr lang="en-US" sz="1800" dirty="0" err="1">
+                <a:solidFill>
+                  <a:srgbClr val="C00000"/>
+                </a:solidFill>
+                <a:latin typeface="SF Pro Rounded Medium" pitchFamily="2" charset="0"/>
+                <a:ea typeface="SF Pro Rounded Medium" pitchFamily="2" charset="0"/>
+                <a:cs typeface="SF Pro Rounded Medium" pitchFamily="2" charset="0"/>
+                <a:sym typeface="Wingdings" pitchFamily="2" charset="2"/>
+              </a:rPr>
+              <a:t>snprintf</a:t>
+            </a:r>
+            <a:r>
+              <a:rPr lang="en-US" sz="1800" dirty="0">
+                <a:solidFill>
+                  <a:srgbClr val="C00000"/>
+                </a:solidFill>
+                <a:latin typeface="SF Pro Rounded Medium" pitchFamily="2" charset="0"/>
+                <a:ea typeface="SF Pro Rounded Medium" pitchFamily="2" charset="0"/>
+                <a:cs typeface="SF Pro Rounded Medium" pitchFamily="2" charset="0"/>
+                <a:sym typeface="Wingdings" pitchFamily="2" charset="2"/>
+              </a:rPr>
+              <a:t>(target, </a:t>
+            </a:r>
+            <a:r>
+              <a:rPr lang="en-US" sz="1800" dirty="0" err="1">
+                <a:solidFill>
+                  <a:srgbClr val="C00000"/>
+                </a:solidFill>
+                <a:latin typeface="SF Pro Rounded Medium" pitchFamily="2" charset="0"/>
+                <a:ea typeface="SF Pro Rounded Medium" pitchFamily="2" charset="0"/>
+                <a:cs typeface="SF Pro Rounded Medium" pitchFamily="2" charset="0"/>
+                <a:sym typeface="Wingdings" pitchFamily="2" charset="2"/>
+              </a:rPr>
+              <a:t>sizeof</a:t>
+            </a:r>
+            <a:r>
+              <a:rPr lang="en-US" sz="1800" dirty="0">
+                <a:solidFill>
+                  <a:srgbClr val="C00000"/>
+                </a:solidFill>
+                <a:latin typeface="SF Pro Rounded Medium" pitchFamily="2" charset="0"/>
+                <a:ea typeface="SF Pro Rounded Medium" pitchFamily="2" charset="0"/>
+                <a:cs typeface="SF Pro Rounded Medium" pitchFamily="2" charset="0"/>
+                <a:sym typeface="Wingdings" pitchFamily="2" charset="2"/>
+              </a:rPr>
+              <a:t>(target), “%s”, string);</a:t>
+            </a:r>
+            <a:endParaRPr lang="en-US" sz="1800" dirty="0">
+              <a:solidFill>
+                <a:srgbClr val="C00000"/>
+              </a:solidFill>
+              <a:latin typeface="SF Pro Rounded Medium" pitchFamily="2" charset="0"/>
+              <a:ea typeface="SF Pro Rounded Medium" pitchFamily="2" charset="0"/>
+              <a:cs typeface="SF Pro Rounded Medium" pitchFamily="2" charset="0"/>
+            </a:endParaRPr>
           </a:p>
           <a:p>
             <a:r>
@@ -22199,8 +22723,8 @@
         </p:nvSpPr>
         <p:spPr>
           <a:xfrm>
-            <a:off x="1141413" y="2249487"/>
-            <a:ext cx="6135688" cy="3541714"/>
+            <a:off x="1141412" y="2249487"/>
+            <a:ext cx="6996067" cy="3541714"/>
           </a:xfrm>
         </p:spPr>
         <p:txBody>
@@ -22257,8 +22781,38 @@
         </p:blipFill>
         <p:spPr>
           <a:xfrm>
-            <a:off x="7277100" y="1371600"/>
-            <a:ext cx="4914900" cy="4114800"/>
+            <a:off x="8137480" y="0"/>
+            <a:ext cx="4054520" cy="3394482"/>
+          </a:xfrm>
+          <a:prstGeom prst="rect">
+            <a:avLst/>
+          </a:prstGeom>
+        </p:spPr>
+      </p:pic>
+      <p:pic>
+        <p:nvPicPr>
+          <p:cNvPr id="6" name="Picture 5" descr="A computer screen with white and yellow text&#10;&#10;AI-generated content may be incorrect.">
+            <a:extLst>
+              <a:ext uri="{FF2B5EF4-FFF2-40B4-BE49-F238E27FC236}">
+                <a16:creationId xmlns:a16="http://schemas.microsoft.com/office/drawing/2014/main" id="{12B2B376-E60C-4C1D-FAE4-1C357F34ADF3}"/>
+              </a:ext>
+            </a:extLst>
+          </p:cNvPr>
+          <p:cNvPicPr>
+            <a:picLocks noChangeAspect="1"/>
+          </p:cNvPicPr>
+          <p:nvPr/>
+        </p:nvPicPr>
+        <p:blipFill>
+          <a:blip r:embed="rId4"/>
+          <a:stretch>
+            <a:fillRect/>
+          </a:stretch>
+        </p:blipFill>
+        <p:spPr>
+          <a:xfrm>
+            <a:off x="5775767" y="3394482"/>
+            <a:ext cx="6416233" cy="3465306"/>
           </a:xfrm>
           <a:prstGeom prst="rect">
             <a:avLst/>
